--- a/ips/영상처리시스템_CH02.pptx
+++ b/ips/영상처리시스템_CH02.pptx
@@ -5416,7 +5416,7 @@
                 <a:ea typeface="프리젠테이션 5 Medium"/>
                 <a:cs typeface="프리젠테이션 5 Medium"/>
               </a:rPr>
-              <a:t>python.org → [Downloads] — 출처: 담당 교수님 강의자료(CH02)</a:t>
+              <a:t>python.org → [Downloads] — 교재 그림 2.2.1 발췌</a:t>
             </a:r>
           </a:p>
         </p:txBody>
@@ -6390,7 +6390,7 @@
                 <a:ea typeface="프리젠테이션 5 Medium"/>
                 <a:cs typeface="프리젠테이션 5 Medium"/>
               </a:rPr>
-              <a:t>IDLE 셸과 [File]→[New File] — 출처: 담당 교수님 강의자료(CH02)</a:t>
+              <a:t>IDLE 셸과 [File]→[New File] — 교재 그림 2.2.4~2.2.5 발췌</a:t>
             </a:r>
           </a:p>
         </p:txBody>
@@ -6510,7 +6510,7 @@
             <a:r>
               <a:rPr sz="2100" b="0">
                 <a:solidFill>
-                  <a:srgbClr val="003956"/>
+                  <a:srgbClr val="0E7D6B"/>
                 </a:solidFill>
                 <a:latin typeface="프리젠테이션 5 Medium"/>
                 <a:ea typeface="프리젠테이션 5 Medium"/>
@@ -6564,7 +6564,7 @@
             <a:r>
               <a:rPr sz="2100" b="0">
                 <a:solidFill>
-                  <a:srgbClr val="003956"/>
+                  <a:srgbClr val="0E7D6B"/>
                 </a:solidFill>
                 <a:latin typeface="프리젠테이션 5 Medium"/>
                 <a:ea typeface="프리젠테이션 5 Medium"/>
@@ -6618,7 +6618,7 @@
             <a:r>
               <a:rPr sz="2100" b="0">
                 <a:solidFill>
-                  <a:srgbClr val="003956"/>
+                  <a:srgbClr val="0E7D6B"/>
                 </a:solidFill>
                 <a:latin typeface="프리젠테이션 5 Medium"/>
                 <a:ea typeface="프리젠테이션 5 Medium"/>
@@ -7204,7 +7204,7 @@
             </a:avLst>
           </a:prstGeom>
           <a:solidFill>
-            <a:srgbClr val="003956"/>
+            <a:srgbClr val="0E7D6B"/>
           </a:solidFill>
           <a:ln>
             <a:noFill/>
@@ -7330,7 +7330,7 @@
             </a:avLst>
           </a:prstGeom>
           <a:solidFill>
-            <a:srgbClr val="003956"/>
+            <a:srgbClr val="0E7D6B"/>
           </a:solidFill>
           <a:ln>
             <a:noFill/>
@@ -7456,7 +7456,7 @@
             </a:avLst>
           </a:prstGeom>
           <a:solidFill>
-            <a:srgbClr val="003956"/>
+            <a:srgbClr val="0E7D6B"/>
           </a:solidFill>
           <a:ln>
             <a:noFill/>
@@ -7565,7 +7565,7 @@
             <a:r>
               <a:rPr sz="2900" b="0">
                 <a:solidFill>
-                  <a:srgbClr val="003956"/>
+                  <a:srgbClr val="0E7D6B"/>
                 </a:solidFill>
                 <a:latin typeface="프리젠테이션 5 Medium"/>
                 <a:ea typeface="프리젠테이션 5 Medium"/>
@@ -7593,7 +7593,7 @@
             </a:avLst>
           </a:prstGeom>
           <a:solidFill>
-            <a:srgbClr val="003956"/>
+            <a:srgbClr val="0E7D6B"/>
           </a:solidFill>
           <a:ln>
             <a:noFill/>
@@ -7719,7 +7719,7 @@
             </a:avLst>
           </a:prstGeom>
           <a:solidFill>
-            <a:srgbClr val="003956"/>
+            <a:srgbClr val="0E7D6B"/>
           </a:solidFill>
           <a:ln>
             <a:noFill/>
@@ -7828,7 +7828,7 @@
             <a:r>
               <a:rPr sz="2900" b="0">
                 <a:solidFill>
-                  <a:srgbClr val="003956"/>
+                  <a:srgbClr val="0E7D6B"/>
                 </a:solidFill>
                 <a:latin typeface="프리젠테이션 5 Medium"/>
                 <a:ea typeface="프리젠테이션 5 Medium"/>
@@ -7954,7 +7954,7 @@
             <a:r>
               <a:rPr sz="2500" b="0">
                 <a:solidFill>
-                  <a:srgbClr val="003956"/>
+                  <a:srgbClr val="0E7D6B"/>
                 </a:solidFill>
                 <a:latin typeface="프리젠테이션 5 Medium"/>
                 <a:ea typeface="프리젠테이션 5 Medium"/>
@@ -7976,7 +7976,7 @@
             <a:r>
               <a:rPr sz="2500" b="0">
                 <a:solidFill>
-                  <a:srgbClr val="003956"/>
+                  <a:srgbClr val="0E7D6B"/>
                 </a:solidFill>
                 <a:latin typeface="프리젠테이션 5 Medium"/>
                 <a:ea typeface="프리젠테이션 5 Medium"/>
@@ -8652,7 +8652,7 @@
                 <a:ea typeface="프리젠테이션 5 Medium"/>
                 <a:cs typeface="프리젠테이션 5 Medium"/>
               </a:rPr>
-              <a:t>[Settings] → [Python Interpreter] → [Add] — 출처: 담당 교수님 강의자료(CH02)</a:t>
+              <a:t>[Settings] → [Python Interpreter] → [Add] — 교재 그림 2.4.2~2.4.3 발췌</a:t>
             </a:r>
           </a:p>
         </p:txBody>
@@ -8790,7 +8790,7 @@
             <a:r>
               <a:rPr sz="2700" b="0">
                 <a:solidFill>
-                  <a:srgbClr val="003956"/>
+                  <a:srgbClr val="0E7D6B"/>
                 </a:solidFill>
                 <a:latin typeface="프리젠테이션 5 Medium"/>
                 <a:ea typeface="프리젠테이션 5 Medium"/>
@@ -9937,7 +9937,7 @@
             <a:r>
               <a:rPr sz="1700" b="0">
                 <a:solidFill>
-                  <a:srgbClr val="003956"/>
+                  <a:srgbClr val="0E7D6B"/>
                 </a:solidFill>
                 <a:latin typeface="프리젠테이션 5 Medium"/>
                 <a:ea typeface="프리젠테이션 5 Medium"/>
@@ -9977,7 +9977,7 @@
             <a:r>
               <a:rPr sz="1700" b="0">
                 <a:solidFill>
-                  <a:srgbClr val="003956"/>
+                  <a:srgbClr val="0E7D6B"/>
                 </a:solidFill>
                 <a:latin typeface="프리젠테이션 5 Medium"/>
                 <a:ea typeface="프리젠테이션 5 Medium"/>
@@ -10114,7 +10114,7 @@
             <a:r>
               <a:rPr sz="2800" b="0">
                 <a:solidFill>
-                  <a:srgbClr val="003956"/>
+                  <a:srgbClr val="0E7D6B"/>
                 </a:solidFill>
                 <a:latin typeface="프리젠테이션 5 Medium"/>
                 <a:ea typeface="프리젠테이션 5 Medium"/>
@@ -10136,7 +10136,7 @@
             <a:r>
               <a:rPr sz="2800" b="0">
                 <a:solidFill>
-                  <a:srgbClr val="003956"/>
+                  <a:srgbClr val="0E7D6B"/>
                 </a:solidFill>
                 <a:latin typeface="프리젠테이션 5 Medium"/>
                 <a:ea typeface="프리젠테이션 5 Medium"/>
@@ -10794,7 +10794,7 @@
                 <a:ea typeface="프리젠테이션 5 Medium"/>
                 <a:cs typeface="프리젠테이션 5 Medium"/>
               </a:rPr>
-              <a:t>Available Packages에서 opencv-python 검색 — 출처: 담당 교수님 강의자료(CH02)</a:t>
+              <a:t>Available Packages에서 opencv-python 검색 — 교재 그림 2.5.2 발췌</a:t>
             </a:r>
           </a:p>
         </p:txBody>
@@ -10925,7 +10925,7 @@
             <a:r>
               <a:rPr sz="2100" b="0">
                 <a:solidFill>
-                  <a:srgbClr val="003956"/>
+                  <a:srgbClr val="0E7D6B"/>
                 </a:solidFill>
                 <a:latin typeface="프리젠테이션 5 Medium"/>
                 <a:ea typeface="프리젠테이션 5 Medium"/>
@@ -10979,7 +10979,7 @@
             <a:r>
               <a:rPr sz="2100" b="0">
                 <a:solidFill>
-                  <a:srgbClr val="003956"/>
+                  <a:srgbClr val="0E7D6B"/>
                 </a:solidFill>
                 <a:latin typeface="프리젠테이션 5 Medium"/>
                 <a:ea typeface="프리젠테이션 5 Medium"/>
@@ -12012,7 +12012,7 @@
             <a:r>
               <a:rPr sz="1700" b="0">
                 <a:solidFill>
-                  <a:srgbClr val="003956"/>
+                  <a:srgbClr val="0E7D6B"/>
                 </a:solidFill>
                 <a:latin typeface="프리젠테이션 5 Medium"/>
                 <a:ea typeface="프리젠테이션 5 Medium"/>
@@ -12066,7 +12066,7 @@
             <a:r>
               <a:rPr sz="1700" b="0">
                 <a:solidFill>
-                  <a:srgbClr val="003956"/>
+                  <a:srgbClr val="0E7D6B"/>
                 </a:solidFill>
                 <a:latin typeface="프리젠테이션 5 Medium"/>
                 <a:ea typeface="프리젠테이션 5 Medium"/>
@@ -12120,7 +12120,7 @@
             <a:r>
               <a:rPr sz="1700" b="0">
                 <a:solidFill>
-                  <a:srgbClr val="003956"/>
+                  <a:srgbClr val="0E7D6B"/>
                 </a:solidFill>
                 <a:latin typeface="프리젠테이션 5 Medium"/>
                 <a:ea typeface="프리젠테이션 5 Medium"/>
@@ -12174,7 +12174,7 @@
             <a:r>
               <a:rPr sz="1700" b="0">
                 <a:solidFill>
-                  <a:srgbClr val="003956"/>
+                  <a:srgbClr val="0E7D6B"/>
                 </a:solidFill>
                 <a:latin typeface="프리젠테이션 5 Medium"/>
                 <a:ea typeface="프리젠테이션 5 Medium"/>
@@ -12340,7 +12340,7 @@
             <a:r>
               <a:rPr sz="1700" b="0">
                 <a:solidFill>
-                  <a:srgbClr val="003956"/>
+                  <a:srgbClr val="0E7D6B"/>
                 </a:solidFill>
                 <a:latin typeface="프리젠테이션 5 Medium"/>
                 <a:ea typeface="프리젠테이션 5 Medium"/>
@@ -12839,7 +12839,7 @@
             <a:r>
               <a:rPr sz="4500" b="0">
                 <a:solidFill>
-                  <a:srgbClr val="003956"/>
+                  <a:srgbClr val="0E7D6B"/>
                 </a:solidFill>
                 <a:latin typeface="페이퍼로지 8 ExtraBold"/>
                 <a:ea typeface="페이퍼로지 8 ExtraBold"/>
@@ -12965,7 +12965,7 @@
             <a:r>
               <a:rPr sz="4500" b="0">
                 <a:solidFill>
-                  <a:srgbClr val="003956"/>
+                  <a:srgbClr val="0E7D6B"/>
                 </a:solidFill>
                 <a:latin typeface="페이퍼로지 8 ExtraBold"/>
                 <a:ea typeface="페이퍼로지 8 ExtraBold"/>
@@ -13091,7 +13091,7 @@
             <a:r>
               <a:rPr sz="4500" b="0">
                 <a:solidFill>
-                  <a:srgbClr val="003956"/>
+                  <a:srgbClr val="0E7D6B"/>
                 </a:solidFill>
                 <a:latin typeface="페이퍼로지 8 ExtraBold"/>
                 <a:ea typeface="페이퍼로지 8 ExtraBold"/>
@@ -13217,7 +13217,7 @@
             <a:r>
               <a:rPr sz="4500" b="0">
                 <a:solidFill>
-                  <a:srgbClr val="003956"/>
+                  <a:srgbClr val="0E7D6B"/>
                 </a:solidFill>
                 <a:latin typeface="페이퍼로지 8 ExtraBold"/>
                 <a:ea typeface="페이퍼로지 8 ExtraBold"/>
@@ -13648,7 +13648,7 @@
             </a:avLst>
           </a:prstGeom>
           <a:solidFill>
-            <a:srgbClr val="003956"/>
+            <a:srgbClr val="0E7D6B"/>
           </a:solidFill>
           <a:ln>
             <a:noFill/>
@@ -13757,7 +13757,7 @@
             <a:r>
               <a:rPr sz="2200" b="0">
                 <a:solidFill>
-                  <a:srgbClr val="003956"/>
+                  <a:srgbClr val="0E7D6B"/>
                 </a:solidFill>
                 <a:latin typeface="프리젠테이션 5 Medium"/>
                 <a:ea typeface="프리젠테이션 5 Medium"/>
@@ -13796,7 +13796,7 @@
             </a:avLst>
           </a:prstGeom>
           <a:solidFill>
-            <a:srgbClr val="003956"/>
+            <a:srgbClr val="0E7D6B"/>
           </a:solidFill>
           <a:ln>
             <a:noFill/>
@@ -13900,12 +13900,12 @@
                 <a:ea typeface="프리젠테이션 5 Medium"/>
                 <a:cs typeface="프리젠테이션 5 Medium"/>
               </a:rPr>
-              <a:t>교수님 강의 자료와 교재의 일부를 </a:t>
+              <a:t>교재의 그림·내용 일부를 </a:t>
             </a:r>
             <a:r>
               <a:rPr sz="2100" b="0">
                 <a:solidFill>
-                  <a:srgbClr val="003956"/>
+                  <a:srgbClr val="0E7D6B"/>
                 </a:solidFill>
                 <a:latin typeface="프리젠테이션 5 Medium"/>
                 <a:ea typeface="프리젠테이션 5 Medium"/>
@@ -13922,7 +13922,7 @@
                 <a:ea typeface="프리젠테이션 5 Medium"/>
                 <a:cs typeface="프리젠테이션 5 Medium"/>
               </a:rPr>
-              <a:t>에 따라 교육·연구 목적으로 발췌·인용하고, 각 슬라이드에 출처(교재 절·쪽)를 명시했다</a:t>
+              <a:t>에 따라 교육·연구 목적으로 발췌·인용하고, 각 슬라이드에 출처(교재 절·그림 번호)를 명시했다</a:t>
             </a:r>
           </a:p>
         </p:txBody>
@@ -13944,7 +13944,7 @@
             </a:avLst>
           </a:prstGeom>
           <a:solidFill>
-            <a:srgbClr val="003956"/>
+            <a:srgbClr val="0E7D6B"/>
           </a:solidFill>
           <a:ln>
             <a:noFill/>
@@ -14053,7 +14053,7 @@
             <a:r>
               <a:rPr sz="2900" b="0">
                 <a:solidFill>
-                  <a:srgbClr val="003956"/>
+                  <a:srgbClr val="0E7D6B"/>
                 </a:solidFill>
                 <a:latin typeface="프리젠테이션 5 Medium"/>
                 <a:ea typeface="프리젠테이션 5 Medium"/>
@@ -14203,7 +14203,7 @@
             <a:r>
               <a:rPr sz="1900" b="0">
                 <a:solidFill>
-                  <a:srgbClr val="003956"/>
+                  <a:srgbClr val="0E7D6B"/>
                 </a:solidFill>
                 <a:latin typeface="프리젠테이션 5 Medium"/>
                 <a:ea typeface="프리젠테이션 5 Medium"/>
@@ -14356,7 +14356,7 @@
               </a:lnSpc>
             </a:pPr>
             <a:r>
-              <a:rPr sz="2100" b="0">
+              <a:rPr sz="2300" b="0">
                 <a:solidFill>
                   <a:srgbClr val="1E2A30"/>
                 </a:solidFill>
@@ -14364,7 +14364,7 @@
                 <a:ea typeface="프리젠테이션 5 Medium"/>
                 <a:cs typeface="프리젠테이션 5 Medium"/>
               </a:rPr>
-              <a:t>정성환·배종욱, 『OpenCV-Python으로 배우는 영상 처리 및 응용』, 생능출판사  ·  담당 교수님 강의 자료(CH01~03)</a:t>
+              <a:t>정성환·배종욱, 『OpenCV-Python으로 배우는 영상 처리 및 응용』, 생능출판사  ·  수업 자료(CH01~03)</a:t>
             </a:r>
           </a:p>
         </p:txBody>
@@ -15103,7 +15103,7 @@
             </a:avLst>
           </a:prstGeom>
           <a:solidFill>
-            <a:srgbClr val="003956"/>
+            <a:srgbClr val="0E7D6B"/>
           </a:solidFill>
           <a:ln>
             <a:noFill/>
@@ -15212,7 +15212,7 @@
             <a:r>
               <a:rPr sz="2900" b="0">
                 <a:solidFill>
-                  <a:srgbClr val="003956"/>
+                  <a:srgbClr val="0E7D6B"/>
                 </a:solidFill>
                 <a:latin typeface="프리젠테이션 5 Medium"/>
                 <a:ea typeface="프리젠테이션 5 Medium"/>
@@ -15251,7 +15251,7 @@
             </a:avLst>
           </a:prstGeom>
           <a:solidFill>
-            <a:srgbClr val="003956"/>
+            <a:srgbClr val="0E7D6B"/>
           </a:solidFill>
           <a:ln>
             <a:noFill/>
@@ -15360,7 +15360,7 @@
             <a:r>
               <a:rPr sz="2900" b="0">
                 <a:solidFill>
-                  <a:srgbClr val="003956"/>
+                  <a:srgbClr val="0E7D6B"/>
                 </a:solidFill>
                 <a:latin typeface="프리젠테이션 5 Medium"/>
                 <a:ea typeface="프리젠테이션 5 Medium"/>
@@ -15399,7 +15399,7 @@
             </a:avLst>
           </a:prstGeom>
           <a:solidFill>
-            <a:srgbClr val="003956"/>
+            <a:srgbClr val="0E7D6B"/>
           </a:solidFill>
           <a:ln>
             <a:noFill/>
@@ -15508,7 +15508,7 @@
             <a:r>
               <a:rPr sz="2900" b="0">
                 <a:solidFill>
-                  <a:srgbClr val="003956"/>
+                  <a:srgbClr val="0E7D6B"/>
                 </a:solidFill>
                 <a:latin typeface="프리젠테이션 5 Medium"/>
                 <a:ea typeface="프리젠테이션 5 Medium"/>
@@ -15663,7 +15663,7 @@
             <a:r>
               <a:rPr sz="2900" b="0">
                 <a:solidFill>
-                  <a:srgbClr val="003956"/>
+                  <a:srgbClr val="0E7D6B"/>
                 </a:solidFill>
                 <a:latin typeface="프리젠테이션 5 Medium"/>
                 <a:ea typeface="프리젠테이션 5 Medium"/>
@@ -16203,7 +16203,7 @@
             <a:r>
               <a:rPr sz="1700" b="0">
                 <a:solidFill>
-                  <a:srgbClr val="003956"/>
+                  <a:srgbClr val="0E7D6B"/>
                 </a:solidFill>
                 <a:latin typeface="프리젠테이션 5 Medium"/>
                 <a:ea typeface="프리젠테이션 5 Medium"/>
@@ -16383,7 +16383,7 @@
             <a:r>
               <a:rPr sz="2300" b="0">
                 <a:solidFill>
-                  <a:srgbClr val="003956"/>
+                  <a:srgbClr val="0E7D6B"/>
                 </a:solidFill>
                 <a:latin typeface="프리젠테이션 5 Medium"/>
                 <a:ea typeface="프리젠테이션 5 Medium"/>
@@ -16592,7 +16592,7 @@
             <a:r>
               <a:rPr sz="2900" b="0">
                 <a:solidFill>
-                  <a:srgbClr val="003956"/>
+                  <a:srgbClr val="0E7D6B"/>
                 </a:solidFill>
                 <a:latin typeface="프리젠테이션 5 Medium"/>
                 <a:ea typeface="프리젠테이션 5 Medium"/>
@@ -17988,7 +17988,7 @@
             <a:r>
               <a:rPr sz="2300" b="0">
                 <a:solidFill>
-                  <a:srgbClr val="003956"/>
+                  <a:srgbClr val="0E7D6B"/>
                 </a:solidFill>
                 <a:latin typeface="프리젠테이션 5 Medium"/>
                 <a:ea typeface="프리젠테이션 5 Medium"/>
@@ -18728,7 +18728,7 @@
             <a:avLst/>
           </a:prstGeom>
           <a:solidFill>
-            <a:srgbClr val="003956"/>
+            <a:srgbClr val="0E7D6B"/>
           </a:solidFill>
           <a:ln>
             <a:noFill/>
@@ -18785,7 +18785,7 @@
             <a:r>
               <a:rPr sz="2500" b="0">
                 <a:solidFill>
-                  <a:srgbClr val="003956"/>
+                  <a:srgbClr val="0E7D6B"/>
                 </a:solidFill>
                 <a:latin typeface="페이퍼로지 8 ExtraBold"/>
                 <a:ea typeface="페이퍼로지 8 ExtraBold"/>
@@ -18955,7 +18955,7 @@
             <a:avLst/>
           </a:prstGeom>
           <a:solidFill>
-            <a:srgbClr val="003956"/>
+            <a:srgbClr val="0E7D6B"/>
           </a:solidFill>
           <a:ln>
             <a:noFill/>
@@ -19012,7 +19012,7 @@
             <a:r>
               <a:rPr sz="2500" b="0">
                 <a:solidFill>
-                  <a:srgbClr val="003956"/>
+                  <a:srgbClr val="0E7D6B"/>
                 </a:solidFill>
                 <a:latin typeface="페이퍼로지 8 ExtraBold"/>
                 <a:ea typeface="페이퍼로지 8 ExtraBold"/>
@@ -19182,7 +19182,7 @@
             <a:avLst/>
           </a:prstGeom>
           <a:solidFill>
-            <a:srgbClr val="003956"/>
+            <a:srgbClr val="0E7D6B"/>
           </a:solidFill>
           <a:ln>
             <a:noFill/>
@@ -19239,7 +19239,7 @@
             <a:r>
               <a:rPr sz="2500" b="0">
                 <a:solidFill>
-                  <a:srgbClr val="003956"/>
+                  <a:srgbClr val="0E7D6B"/>
                 </a:solidFill>
                 <a:latin typeface="페이퍼로지 8 ExtraBold"/>
                 <a:ea typeface="페이퍼로지 8 ExtraBold"/>
@@ -19409,7 +19409,7 @@
             <a:avLst/>
           </a:prstGeom>
           <a:solidFill>
-            <a:srgbClr val="003956"/>
+            <a:srgbClr val="0E7D6B"/>
           </a:solidFill>
           <a:ln>
             <a:noFill/>
@@ -19466,7 +19466,7 @@
             <a:r>
               <a:rPr sz="2500" b="0">
                 <a:solidFill>
-                  <a:srgbClr val="003956"/>
+                  <a:srgbClr val="0E7D6B"/>
                 </a:solidFill>
                 <a:latin typeface="페이퍼로지 8 ExtraBold"/>
                 <a:ea typeface="페이퍼로지 8 ExtraBold"/>
@@ -20114,7 +20114,7 @@
             <a:r>
               <a:rPr sz="2500" b="0">
                 <a:solidFill>
-                  <a:srgbClr val="003956"/>
+                  <a:srgbClr val="0E7D6B"/>
                 </a:solidFill>
                 <a:latin typeface="페이퍼로지 8 ExtraBold"/>
                 <a:ea typeface="페이퍼로지 8 ExtraBold"/>
@@ -20155,7 +20155,7 @@
             <a:r>
               <a:rPr sz="2500" b="0">
                 <a:solidFill>
-                  <a:srgbClr val="003956"/>
+                  <a:srgbClr val="0E7D6B"/>
                 </a:solidFill>
                 <a:latin typeface="페이퍼로지 8 ExtraBold"/>
                 <a:ea typeface="페이퍼로지 8 ExtraBold"/>
@@ -20877,7 +20877,7 @@
             <a:r>
               <a:rPr sz="2800" b="0">
                 <a:solidFill>
-                  <a:srgbClr val="003956"/>
+                  <a:srgbClr val="0E7D6B"/>
                 </a:solidFill>
                 <a:latin typeface="프리젠테이션 5 Medium"/>
                 <a:ea typeface="프리젠테이션 5 Medium"/>
@@ -21556,7 +21556,7 @@
             <a:avLst/>
           </a:prstGeom>
           <a:solidFill>
-            <a:srgbClr val="003956"/>
+            <a:srgbClr val="0E7D6B"/>
           </a:solidFill>
           <a:ln>
             <a:noFill/>
@@ -21613,7 +21613,7 @@
             <a:r>
               <a:rPr sz="2500" b="0">
                 <a:solidFill>
-                  <a:srgbClr val="003956"/>
+                  <a:srgbClr val="0E7D6B"/>
                 </a:solidFill>
                 <a:latin typeface="페이퍼로지 8 ExtraBold"/>
                 <a:ea typeface="페이퍼로지 8 ExtraBold"/>
@@ -21801,7 +21801,7 @@
             <a:avLst/>
           </a:prstGeom>
           <a:solidFill>
-            <a:srgbClr val="003956"/>
+            <a:srgbClr val="0E7D6B"/>
           </a:solidFill>
           <a:ln>
             <a:noFill/>
@@ -21858,7 +21858,7 @@
             <a:r>
               <a:rPr sz="2500" b="0">
                 <a:solidFill>
-                  <a:srgbClr val="003956"/>
+                  <a:srgbClr val="0E7D6B"/>
                 </a:solidFill>
                 <a:latin typeface="페이퍼로지 8 ExtraBold"/>
                 <a:ea typeface="페이퍼로지 8 ExtraBold"/>
@@ -22046,7 +22046,7 @@
             <a:avLst/>
           </a:prstGeom>
           <a:solidFill>
-            <a:srgbClr val="003956"/>
+            <a:srgbClr val="0E7D6B"/>
           </a:solidFill>
           <a:ln>
             <a:noFill/>
@@ -22103,7 +22103,7 @@
             <a:r>
               <a:rPr sz="2500" b="0">
                 <a:solidFill>
-                  <a:srgbClr val="003956"/>
+                  <a:srgbClr val="0E7D6B"/>
                 </a:solidFill>
                 <a:latin typeface="페이퍼로지 8 ExtraBold"/>
                 <a:ea typeface="페이퍼로지 8 ExtraBold"/>
@@ -22291,7 +22291,7 @@
             <a:avLst/>
           </a:prstGeom>
           <a:solidFill>
-            <a:srgbClr val="003956"/>
+            <a:srgbClr val="0E7D6B"/>
           </a:solidFill>
           <a:ln>
             <a:noFill/>
@@ -22348,7 +22348,7 @@
             <a:r>
               <a:rPr sz="2500" b="0">
                 <a:solidFill>
-                  <a:srgbClr val="003956"/>
+                  <a:srgbClr val="0E7D6B"/>
                 </a:solidFill>
                 <a:latin typeface="페이퍼로지 8 ExtraBold"/>
                 <a:ea typeface="페이퍼로지 8 ExtraBold"/>
@@ -22564,7 +22564,7 @@
             <a:r>
               <a:rPr sz="1700" b="0">
                 <a:solidFill>
-                  <a:srgbClr val="003956"/>
+                  <a:srgbClr val="0E7D6B"/>
                 </a:solidFill>
                 <a:latin typeface="프리젠테이션 5 Medium"/>
                 <a:ea typeface="프리젠테이션 5 Medium"/>
@@ -22604,7 +22604,7 @@
             <a:r>
               <a:rPr sz="1700" b="0">
                 <a:solidFill>
-                  <a:srgbClr val="003956"/>
+                  <a:srgbClr val="0E7D6B"/>
                 </a:solidFill>
                 <a:latin typeface="프리젠테이션 5 Medium"/>
                 <a:ea typeface="프리젠테이션 5 Medium"/>
@@ -22752,7 +22752,7 @@
             <a:r>
               <a:rPr sz="2200" b="0">
                 <a:solidFill>
-                  <a:srgbClr val="003956"/>
+                  <a:srgbClr val="0E7D6B"/>
                 </a:solidFill>
                 <a:latin typeface="프리젠테이션 5 Medium"/>
                 <a:ea typeface="프리젠테이션 5 Medium"/>

--- a/ips/영상처리시스템_CH02.pptx
+++ b/ips/영상처리시스템_CH02.pptx
@@ -4757,7 +4757,7 @@
                 <a:ea typeface="페이퍼로지 6 SemiBold"/>
                 <a:cs typeface="페이퍼로지 6 SemiBold"/>
               </a:rPr>
-              <a:t>CHAPTER 02  ·  OpenCV와 파이썬</a:t>
+              <a:t>CHAPTER 02  ·  도구를 갖추다</a:t>
             </a:r>
           </a:p>
         </p:txBody>
@@ -5220,7 +5220,7 @@
                 <a:ea typeface="페이퍼로지 6 SemiBold"/>
                 <a:cs typeface="페이퍼로지 6 SemiBold"/>
               </a:rPr>
-              <a:t>CH 02 · OpenCV와 파이썬</a:t>
+              <a:t>CH 02 · 도구를 갖추다</a:t>
             </a:r>
           </a:p>
         </p:txBody>
@@ -6194,7 +6194,7 @@
                 <a:ea typeface="페이퍼로지 6 SemiBold"/>
                 <a:cs typeface="페이퍼로지 6 SemiBold"/>
               </a:rPr>
-              <a:t>CH 02 · OpenCV와 파이썬</a:t>
+              <a:t>CH 02 · 도구를 갖추다</a:t>
             </a:r>
           </a:p>
         </p:txBody>
@@ -7141,7 +7141,7 @@
                 <a:ea typeface="페이퍼로지 6 SemiBold"/>
                 <a:cs typeface="페이퍼로지 6 SemiBold"/>
               </a:rPr>
-              <a:t>CH 02 · OpenCV와 파이썬</a:t>
+              <a:t>CH 02 · 도구를 갖추다</a:t>
             </a:r>
           </a:p>
         </p:txBody>
@@ -8456,7 +8456,7 @@
                 <a:ea typeface="페이퍼로지 6 SemiBold"/>
                 <a:cs typeface="페이퍼로지 6 SemiBold"/>
               </a:rPr>
-              <a:t>CH 02 · OpenCV와 파이썬</a:t>
+              <a:t>CH 02 · 도구를 갖추다</a:t>
             </a:r>
           </a:p>
         </p:txBody>
@@ -9262,7 +9262,7 @@
                 <a:ea typeface="페이퍼로지 8 ExtraBold"/>
                 <a:cs typeface="페이퍼로지 8 ExtraBold"/>
               </a:rPr>
-              <a:t>2.5  opencv-python 설치</a:t>
+              <a:t>라이브러리 설치 — opencv-python</a:t>
             </a:r>
           </a:p>
         </p:txBody>
@@ -9345,7 +9345,7 @@
                 <a:ea typeface="페이퍼로지 6 SemiBold"/>
                 <a:cs typeface="페이퍼로지 6 SemiBold"/>
               </a:rPr>
-              <a:t>CH 02 · OpenCV와 파이썬</a:t>
+              <a:t>CH 02 · 도구를 갖추다</a:t>
             </a:r>
           </a:p>
         </p:txBody>
@@ -10598,7 +10598,7 @@
                 <a:ea typeface="페이퍼로지 6 SemiBold"/>
                 <a:cs typeface="페이퍼로지 6 SemiBold"/>
               </a:rPr>
-              <a:t>CH 02 · OpenCV와 파이썬</a:t>
+              <a:t>CH 02 · 도구를 갖추다</a:t>
             </a:r>
           </a:p>
         </p:txBody>
@@ -11563,7 +11563,7 @@
                 <a:ea typeface="페이퍼로지 6 SemiBold"/>
                 <a:cs typeface="페이퍼로지 6 SemiBold"/>
               </a:rPr>
-              <a:t>CH 02 · OpenCV와 파이썬</a:t>
+              <a:t>CH 02 · 도구를 갖추다</a:t>
             </a:r>
           </a:p>
         </p:txBody>
@@ -12719,7 +12719,7 @@
                 <a:ea typeface="페이퍼로지 6 SemiBold"/>
                 <a:cs typeface="페이퍼로지 6 SemiBold"/>
               </a:rPr>
-              <a:t>CH 02 · OpenCV와 파이썬</a:t>
+              <a:t>CH 02 · 도구를 갖추다</a:t>
             </a:r>
           </a:p>
         </p:txBody>
@@ -14514,7 +14514,7 @@
                 <a:ea typeface="페이퍼로지 8 ExtraBold"/>
                 <a:cs typeface="페이퍼로지 8 ExtraBold"/>
               </a:rPr>
-              <a:t>OpenCV와 파이썬</a:t>
+              <a:t>도구를 갖추다</a:t>
             </a:r>
           </a:p>
         </p:txBody>
@@ -14555,7 +14555,7 @@
                 <a:ea typeface="페이퍼로지 6 SemiBold"/>
                 <a:cs typeface="페이퍼로지 6 SemiBold"/>
               </a:rPr>
-              <a:t>OpenCV and Python</a:t>
+              <a:t>Setting Up: Python, PyCharm, OpenCV</a:t>
             </a:r>
           </a:p>
         </p:txBody>
@@ -14596,7 +14596,7 @@
                 <a:ea typeface="프리젠테이션 5 Medium"/>
                 <a:cs typeface="프리젠테이션 5 Medium"/>
               </a:rPr>
-              <a:t>·  2.1 OpenCV와 파이썬 개요   ·   2.2 파이썬 설치 및 사용</a:t>
+              <a:t>·  OpenCV, 컴퓨터 비전의 공구함   ·   20년의 진화</a:t>
             </a:r>
           </a:p>
         </p:txBody>
@@ -14637,7 +14637,7 @@
                 <a:ea typeface="프리젠테이션 5 Medium"/>
                 <a:cs typeface="프리젠테이션 5 Medium"/>
               </a:rPr>
-              <a:t>·  2.3 파이참 설치   ·   2.4 파이참 환경 설정</a:t>
+              <a:t>·  파이썬이라는 짝   ·   개발 환경 구축 로드맵</a:t>
             </a:r>
           </a:p>
         </p:txBody>
@@ -14678,7 +14678,7 @@
                 <a:ea typeface="프리젠테이션 5 Medium"/>
                 <a:cs typeface="프리젠테이션 5 Medium"/>
               </a:rPr>
-              <a:t>·  2.5 OpenCV-Python 및 라이브러리 설치</a:t>
+              <a:t>·  실전 화면 따라가기   ·   첫 프로그램, 회색 창</a:t>
             </a:r>
           </a:p>
         </p:txBody>
@@ -15040,7 +15040,7 @@
                 <a:ea typeface="페이퍼로지 6 SemiBold"/>
                 <a:cs typeface="페이퍼로지 6 SemiBold"/>
               </a:rPr>
-              <a:t>CH 02 · OpenCV와 파이썬</a:t>
+              <a:t>CH 02 · 도구를 갖추다</a:t>
             </a:r>
           </a:p>
         </p:txBody>
@@ -15959,7 +15959,7 @@
                 <a:ea typeface="페이퍼로지 8 ExtraBold"/>
                 <a:cs typeface="페이퍼로지 8 ExtraBold"/>
               </a:rPr>
-              <a:t>2.1  OpenCV — 컴퓨터 비전의 표준 공구함</a:t>
+              <a:t>OpenCV — 컴퓨터 비전의 공구함</a:t>
             </a:r>
           </a:p>
         </p:txBody>
@@ -16042,7 +16042,7 @@
                 <a:ea typeface="페이퍼로지 6 SemiBold"/>
                 <a:cs typeface="페이퍼로지 6 SemiBold"/>
               </a:rPr>
-              <a:t>CH 02 · OpenCV와 파이썬</a:t>
+              <a:t>CH 02 · 도구를 갖추다</a:t>
             </a:r>
           </a:p>
         </p:txBody>
@@ -17054,7 +17054,7 @@
                 <a:ea typeface="페이퍼로지 6 SemiBold"/>
                 <a:cs typeface="페이퍼로지 6 SemiBold"/>
               </a:rPr>
-              <a:t>CH 02 · OpenCV와 파이썬</a:t>
+              <a:t>CH 02 · 도구를 갖추다</a:t>
             </a:r>
           </a:p>
         </p:txBody>
@@ -18468,7 +18468,7 @@
                 <a:ea typeface="페이퍼로지 6 SemiBold"/>
                 <a:cs typeface="페이퍼로지 6 SemiBold"/>
               </a:rPr>
-              <a:t>CH 02 · OpenCV와 파이썬</a:t>
+              <a:t>CH 02 · 도구를 갖추다</a:t>
             </a:r>
           </a:p>
         </p:txBody>
@@ -19911,7 +19911,7 @@
                 <a:ea typeface="페이퍼로지 8 ExtraBold"/>
                 <a:cs typeface="페이퍼로지 8 ExtraBold"/>
               </a:rPr>
-              <a:t>2.1  파이썬 — 실험에 최적화된 언어</a:t>
+              <a:t>파이썬이라는 짝 — 실험에 최적화된 언어</a:t>
             </a:r>
           </a:p>
         </p:txBody>
@@ -19994,7 +19994,7 @@
                 <a:ea typeface="페이퍼로지 6 SemiBold"/>
                 <a:cs typeface="페이퍼로지 6 SemiBold"/>
               </a:rPr>
-              <a:t>CH 02 · OpenCV와 파이썬</a:t>
+              <a:t>CH 02 · 도구를 갖추다</a:t>
             </a:r>
           </a:p>
         </p:txBody>
@@ -21451,7 +21451,7 @@
                 <a:ea typeface="페이퍼로지 6 SemiBold"/>
                 <a:cs typeface="페이퍼로지 6 SemiBold"/>
               </a:rPr>
-              <a:t>CH 02 · OpenCV와 파이썬</a:t>
+              <a:t>CH 02 · 도구를 갖추다</a:t>
             </a:r>
           </a:p>
         </p:txBody>

--- a/ips/영상처리시스템_CH02.pptx
+++ b/ips/영상처리시스템_CH02.pptx
@@ -4757,7 +4757,7 @@
                 <a:ea typeface="페이퍼로지 6 SemiBold"/>
                 <a:cs typeface="페이퍼로지 6 SemiBold"/>
               </a:rPr>
-              <a:t>CHAPTER 02  ·  도구를 갖추다</a:t>
+              <a:t>CHAPTER 02  ·  개발 환경 구축</a:t>
             </a:r>
           </a:p>
         </p:txBody>
@@ -5220,7 +5220,7 @@
                 <a:ea typeface="페이퍼로지 6 SemiBold"/>
                 <a:cs typeface="페이퍼로지 6 SemiBold"/>
               </a:rPr>
-              <a:t>CH 02 · 도구를 갖추다</a:t>
+              <a:t>CH 02 · 개발 환경 구축</a:t>
             </a:r>
           </a:p>
         </p:txBody>
@@ -6194,7 +6194,7 @@
                 <a:ea typeface="페이퍼로지 6 SemiBold"/>
                 <a:cs typeface="페이퍼로지 6 SemiBold"/>
               </a:rPr>
-              <a:t>CH 02 · 도구를 갖추다</a:t>
+              <a:t>CH 02 · 개발 환경 구축</a:t>
             </a:r>
           </a:p>
         </p:txBody>
@@ -7141,7 +7141,7 @@
                 <a:ea typeface="페이퍼로지 6 SemiBold"/>
                 <a:cs typeface="페이퍼로지 6 SemiBold"/>
               </a:rPr>
-              <a:t>CH 02 · 도구를 갖추다</a:t>
+              <a:t>CH 02 · 개발 환경 구축</a:t>
             </a:r>
           </a:p>
         </p:txBody>
@@ -8456,7 +8456,7 @@
                 <a:ea typeface="페이퍼로지 6 SemiBold"/>
                 <a:cs typeface="페이퍼로지 6 SemiBold"/>
               </a:rPr>
-              <a:t>CH 02 · 도구를 갖추다</a:t>
+              <a:t>CH 02 · 개발 환경 구축</a:t>
             </a:r>
           </a:p>
         </p:txBody>
@@ -9345,7 +9345,7 @@
                 <a:ea typeface="페이퍼로지 6 SemiBold"/>
                 <a:cs typeface="페이퍼로지 6 SemiBold"/>
               </a:rPr>
-              <a:t>CH 02 · 도구를 갖추다</a:t>
+              <a:t>CH 02 · 개발 환경 구축</a:t>
             </a:r>
           </a:p>
         </p:txBody>
@@ -10598,7 +10598,7 @@
                 <a:ea typeface="페이퍼로지 6 SemiBold"/>
                 <a:cs typeface="페이퍼로지 6 SemiBold"/>
               </a:rPr>
-              <a:t>CH 02 · 도구를 갖추다</a:t>
+              <a:t>CH 02 · 개발 환경 구축</a:t>
             </a:r>
           </a:p>
         </p:txBody>
@@ -11563,7 +11563,7 @@
                 <a:ea typeface="페이퍼로지 6 SemiBold"/>
                 <a:cs typeface="페이퍼로지 6 SemiBold"/>
               </a:rPr>
-              <a:t>CH 02 · 도구를 갖추다</a:t>
+              <a:t>CH 02 · 개발 환경 구축</a:t>
             </a:r>
           </a:p>
         </p:txBody>
@@ -12719,7 +12719,7 @@
                 <a:ea typeface="페이퍼로지 6 SemiBold"/>
                 <a:cs typeface="페이퍼로지 6 SemiBold"/>
               </a:rPr>
-              <a:t>CH 02 · 도구를 갖추다</a:t>
+              <a:t>CH 02 · 개발 환경 구축</a:t>
             </a:r>
           </a:p>
         </p:txBody>
@@ -14514,7 +14514,7 @@
                 <a:ea typeface="페이퍼로지 8 ExtraBold"/>
                 <a:cs typeface="페이퍼로지 8 ExtraBold"/>
               </a:rPr>
-              <a:t>도구를 갖추다</a:t>
+              <a:t>개발 환경 구축</a:t>
             </a:r>
           </a:p>
         </p:txBody>
@@ -14555,7 +14555,7 @@
                 <a:ea typeface="페이퍼로지 6 SemiBold"/>
                 <a:cs typeface="페이퍼로지 6 SemiBold"/>
               </a:rPr>
-              <a:t>Setting Up: Python, PyCharm, OpenCV</a:t>
+              <a:t>Python · PyCharm · OpenCV</a:t>
             </a:r>
           </a:p>
         </p:txBody>
@@ -15040,7 +15040,7 @@
                 <a:ea typeface="페이퍼로지 6 SemiBold"/>
                 <a:cs typeface="페이퍼로지 6 SemiBold"/>
               </a:rPr>
-              <a:t>CH 02 · 도구를 갖추다</a:t>
+              <a:t>CH 02 · 개발 환경 구축</a:t>
             </a:r>
           </a:p>
         </p:txBody>
@@ -16042,7 +16042,7 @@
                 <a:ea typeface="페이퍼로지 6 SemiBold"/>
                 <a:cs typeface="페이퍼로지 6 SemiBold"/>
               </a:rPr>
-              <a:t>CH 02 · 도구를 갖추다</a:t>
+              <a:t>CH 02 · 개발 환경 구축</a:t>
             </a:r>
           </a:p>
         </p:txBody>
@@ -17054,7 +17054,7 @@
                 <a:ea typeface="페이퍼로지 6 SemiBold"/>
                 <a:cs typeface="페이퍼로지 6 SemiBold"/>
               </a:rPr>
-              <a:t>CH 02 · 도구를 갖추다</a:t>
+              <a:t>CH 02 · 개발 환경 구축</a:t>
             </a:r>
           </a:p>
         </p:txBody>
@@ -18468,7 +18468,7 @@
                 <a:ea typeface="페이퍼로지 6 SemiBold"/>
                 <a:cs typeface="페이퍼로지 6 SemiBold"/>
               </a:rPr>
-              <a:t>CH 02 · 도구를 갖추다</a:t>
+              <a:t>CH 02 · 개발 환경 구축</a:t>
             </a:r>
           </a:p>
         </p:txBody>
@@ -19994,7 +19994,7 @@
                 <a:ea typeface="페이퍼로지 6 SemiBold"/>
                 <a:cs typeface="페이퍼로지 6 SemiBold"/>
               </a:rPr>
-              <a:t>CH 02 · 도구를 갖추다</a:t>
+              <a:t>CH 02 · 개발 환경 구축</a:t>
             </a:r>
           </a:p>
         </p:txBody>
@@ -21451,7 +21451,7 @@
                 <a:ea typeface="페이퍼로지 6 SemiBold"/>
                 <a:cs typeface="페이퍼로지 6 SemiBold"/>
               </a:rPr>
-              <a:t>CH 02 · 도구를 갖추다</a:t>
+              <a:t>CH 02 · 개발 환경 구축</a:t>
             </a:r>
           </a:p>
         </p:txBody>

--- a/ips/영상처리시스템_CH02.pptx
+++ b/ips/영상처리시스템_CH02.pptx
@@ -4582,7 +4582,7 @@
               </a:lnSpc>
             </a:pPr>
             <a:r>
-              <a:rPr sz="2400" b="0">
+              <a:rPr sz="2400" b="0" lang="ko-KR" altLang="en-US">
                 <a:solidFill>
                   <a:srgbClr val="96A8A7"/>
                 </a:solidFill>
@@ -4623,7 +4623,7 @@
               </a:lnSpc>
             </a:pPr>
             <a:r>
-              <a:rPr sz="8500" b="0">
+              <a:rPr sz="8500" b="0" lang="ko-KR" altLang="en-US">
                 <a:solidFill>
                   <a:srgbClr val="FFFFFF"/>
                 </a:solidFill>
@@ -4708,7 +4708,7 @@
               </a:lnSpc>
             </a:pPr>
             <a:r>
-              <a:rPr sz="2600" b="0">
+              <a:rPr sz="2600" b="0" lang="ko-KR" altLang="en-US">
                 <a:solidFill>
                   <a:srgbClr val="FFFFFF"/>
                 </a:solidFill>
@@ -4749,7 +4749,7 @@
               </a:lnSpc>
             </a:pPr>
             <a:r>
-              <a:rPr sz="2900" b="0">
+              <a:rPr sz="2900" b="0" lang="ko-KR" altLang="en-US">
                 <a:solidFill>
                   <a:srgbClr val="C9D4E2"/>
                 </a:solidFill>
@@ -4832,7 +4832,7 @@
               </a:lnSpc>
             </a:pPr>
             <a:r>
-              <a:rPr sz="2500" b="0">
+              <a:rPr sz="2500" b="0" lang="ko-KR" altLang="en-US">
                 <a:solidFill>
                   <a:srgbClr val="96A8A7"/>
                 </a:solidFill>
@@ -4850,7 +4850,7 @@
               </a:lnSpc>
             </a:pPr>
             <a:r>
-              <a:rPr sz="2500" b="0">
+              <a:rPr sz="2500" b="0" lang="ko-KR" altLang="en-US">
                 <a:solidFill>
                   <a:srgbClr val="96A8A7"/>
                 </a:solidFill>
@@ -4985,7 +4985,7 @@
               </a:lnSpc>
             </a:pPr>
             <a:r>
-              <a:rPr sz="1250" b="0">
+              <a:rPr sz="1250" b="0" lang="ko-KR" altLang="en-US">
                 <a:solidFill>
                   <a:srgbClr val="003956"/>
                 </a:solidFill>
@@ -5003,7 +5003,7 @@
               </a:lnSpc>
             </a:pPr>
             <a:r>
-              <a:rPr sz="1250" b="0">
+              <a:rPr sz="1250" b="0" lang="ko-KR" altLang="en-US">
                 <a:solidFill>
                   <a:srgbClr val="003956"/>
                 </a:solidFill>
@@ -5044,7 +5044,7 @@
               </a:lnSpc>
             </a:pPr>
             <a:r>
-              <a:rPr sz="1600" b="0">
+              <a:rPr sz="1600" b="0" lang="ko-KR" altLang="en-US">
                 <a:solidFill>
                   <a:srgbClr val="96A8A7"/>
                 </a:solidFill>
@@ -5129,7 +5129,7 @@
               </a:lnSpc>
             </a:pPr>
             <a:r>
-              <a:rPr sz="3500" b="0">
+              <a:rPr sz="3500" b="0" lang="ko-KR" altLang="en-US">
                 <a:solidFill>
                   <a:srgbClr val="1E2A30"/>
                 </a:solidFill>
@@ -5212,7 +5212,7 @@
               </a:lnSpc>
             </a:pPr>
             <a:r>
-              <a:rPr sz="2200" b="0">
+              <a:rPr sz="2200" b="0" lang="ko-KR" altLang="en-US">
                 <a:solidFill>
                   <a:srgbClr val="6B7A80"/>
                 </a:solidFill>
@@ -5253,7 +5253,7 @@
               </a:lnSpc>
             </a:pPr>
             <a:r>
-              <a:rPr sz="2100" b="0">
+              <a:rPr sz="2100" b="0" lang="ko-KR" altLang="en-US">
                 <a:solidFill>
                   <a:srgbClr val="6B7A80"/>
                 </a:solidFill>
@@ -5408,7 +5408,7 @@
               </a:lnSpc>
             </a:pPr>
             <a:r>
-              <a:rPr sz="2300" b="0">
+              <a:rPr sz="2300" b="0" lang="ko-KR" altLang="en-US">
                 <a:solidFill>
                   <a:srgbClr val="6B7A80"/>
                 </a:solidFill>
@@ -5493,7 +5493,7 @@
               </a:lnSpc>
             </a:pPr>
             <a:r>
-              <a:rPr sz="2700" b="0">
+              <a:rPr sz="2700" b="0" lang="ko-KR" altLang="en-US">
                 <a:solidFill>
                   <a:srgbClr val="003956"/>
                 </a:solidFill>
@@ -5534,7 +5534,7 @@
               </a:lnSpc>
             </a:pPr>
             <a:r>
-              <a:rPr sz="2200" b="0">
+              <a:rPr sz="2200" b="0" lang="ko-KR" altLang="en-US">
                 <a:solidFill>
                   <a:srgbClr val="1E2A30"/>
                 </a:solidFill>
@@ -5552,7 +5552,7 @@
               </a:lnSpc>
             </a:pPr>
             <a:r>
-              <a:rPr sz="2200" b="0">
+              <a:rPr sz="2200" b="0" lang="ko-KR" altLang="en-US">
                 <a:solidFill>
                   <a:srgbClr val="1E2A30"/>
                 </a:solidFill>
@@ -5577,7 +5577,7 @@
               </a:lnSpc>
             </a:pPr>
             <a:r>
-              <a:rPr sz="2200" b="0">
+              <a:rPr sz="2200" b="0" lang="ko-KR" altLang="en-US">
                 <a:solidFill>
                   <a:srgbClr val="1E2A30"/>
                 </a:solidFill>
@@ -5595,7 +5595,7 @@
               </a:lnSpc>
             </a:pPr>
             <a:r>
-              <a:rPr sz="2200" b="0">
+              <a:rPr sz="2200" b="0" lang="ko-KR" altLang="en-US">
                 <a:solidFill>
                   <a:srgbClr val="1E2A30"/>
                 </a:solidFill>
@@ -5682,7 +5682,7 @@
               </a:lnSpc>
             </a:pPr>
             <a:r>
-              <a:rPr sz="2600" b="0">
+              <a:rPr sz="2600" b="0" lang="ko-KR" altLang="en-US">
                 <a:solidFill>
                   <a:srgbClr val="C1662F"/>
                 </a:solidFill>
@@ -5723,7 +5723,7 @@
               </a:lnSpc>
             </a:pPr>
             <a:r>
-              <a:rPr sz="3000" b="0">
+              <a:rPr sz="2900" b="0" lang="ko-KR" altLang="en-US">
                 <a:solidFill>
                   <a:srgbClr val="1E2A30"/>
                 </a:solidFill>
@@ -5741,7 +5741,7 @@
               </a:lnSpc>
             </a:pPr>
             <a:r>
-              <a:rPr sz="3000" b="0">
+              <a:rPr sz="2900" b="0" lang="ko-KR" altLang="en-US">
                 <a:solidFill>
                   <a:srgbClr val="1E2A30"/>
                 </a:solidFill>
@@ -5824,7 +5824,7 @@
               </a:lnSpc>
             </a:pPr>
             <a:r>
-              <a:rPr sz="2200" b="0">
+              <a:rPr sz="2200" b="0" lang="ko-KR" altLang="en-US">
                 <a:solidFill>
                   <a:srgbClr val="6B7A80"/>
                 </a:solidFill>
@@ -5959,7 +5959,7 @@
               </a:lnSpc>
             </a:pPr>
             <a:r>
-              <a:rPr sz="1250" b="0">
+              <a:rPr sz="1250" b="0" lang="ko-KR" altLang="en-US">
                 <a:solidFill>
                   <a:srgbClr val="003956"/>
                 </a:solidFill>
@@ -5977,7 +5977,7 @@
               </a:lnSpc>
             </a:pPr>
             <a:r>
-              <a:rPr sz="1250" b="0">
+              <a:rPr sz="1250" b="0" lang="ko-KR" altLang="en-US">
                 <a:solidFill>
                   <a:srgbClr val="003956"/>
                 </a:solidFill>
@@ -6018,7 +6018,7 @@
               </a:lnSpc>
             </a:pPr>
             <a:r>
-              <a:rPr sz="1600" b="0">
+              <a:rPr sz="1600" b="0" lang="ko-KR" altLang="en-US">
                 <a:solidFill>
                   <a:srgbClr val="96A8A7"/>
                 </a:solidFill>
@@ -6103,7 +6103,7 @@
               </a:lnSpc>
             </a:pPr>
             <a:r>
-              <a:rPr sz="3500" b="0">
+              <a:rPr sz="3500" b="0" lang="ko-KR" altLang="en-US">
                 <a:solidFill>
                   <a:srgbClr val="1E2A30"/>
                 </a:solidFill>
@@ -6186,7 +6186,7 @@
               </a:lnSpc>
             </a:pPr>
             <a:r>
-              <a:rPr sz="2200" b="0">
+              <a:rPr sz="2200" b="0" lang="ko-KR" altLang="en-US">
                 <a:solidFill>
                   <a:srgbClr val="6B7A80"/>
                 </a:solidFill>
@@ -6227,7 +6227,7 @@
               </a:lnSpc>
             </a:pPr>
             <a:r>
-              <a:rPr sz="2100" b="0">
+              <a:rPr sz="2100" b="0" lang="ko-KR" altLang="en-US">
                 <a:solidFill>
                   <a:srgbClr val="6B7A80"/>
                 </a:solidFill>
@@ -6382,7 +6382,7 @@
               </a:lnSpc>
             </a:pPr>
             <a:r>
-              <a:rPr sz="2300" b="0">
+              <a:rPr sz="2200" b="0" lang="ko-KR" altLang="en-US">
                 <a:solidFill>
                   <a:srgbClr val="6B7A80"/>
                 </a:solidFill>
@@ -6467,7 +6467,7 @@
               </a:lnSpc>
             </a:pPr>
             <a:r>
-              <a:rPr sz="2700" b="0">
+              <a:rPr sz="2700" b="0" lang="ko-KR" altLang="en-US">
                 <a:solidFill>
                   <a:srgbClr val="003956"/>
                 </a:solidFill>
@@ -6508,7 +6508,7 @@
               </a:lnSpc>
             </a:pPr>
             <a:r>
-              <a:rPr sz="2100" b="0">
+              <a:rPr sz="2100" b="0" lang="ko-KR" altLang="en-US">
                 <a:solidFill>
                   <a:srgbClr val="0E7D6B"/>
                 </a:solidFill>
@@ -6519,7 +6519,7 @@
               <a:t>① 셸</a:t>
             </a:r>
             <a:r>
-              <a:rPr sz="2100" b="0">
+              <a:rPr sz="2100" b="0" lang="ko-KR" altLang="en-US">
                 <a:solidFill>
                   <a:srgbClr val="1E2A30"/>
                 </a:solidFill>
@@ -6537,7 +6537,7 @@
               </a:lnSpc>
             </a:pPr>
             <a:r>
-              <a:rPr sz="2100" b="0">
+              <a:rPr sz="2100" b="0" lang="ko-KR" altLang="en-US">
                 <a:solidFill>
                   <a:srgbClr val="1E2A30"/>
                 </a:solidFill>
@@ -6562,7 +6562,7 @@
               </a:lnSpc>
             </a:pPr>
             <a:r>
-              <a:rPr sz="2100" b="0">
+              <a:rPr sz="2100" b="0" lang="ko-KR" altLang="en-US">
                 <a:solidFill>
                   <a:srgbClr val="0E7D6B"/>
                 </a:solidFill>
@@ -6573,7 +6573,7 @@
               <a:t>② New File</a:t>
             </a:r>
             <a:r>
-              <a:rPr sz="2100" b="0">
+              <a:rPr sz="2100" b="0" lang="ko-KR" altLang="en-US">
                 <a:solidFill>
                   <a:srgbClr val="1E2A30"/>
                 </a:solidFill>
@@ -6591,7 +6591,7 @@
               </a:lnSpc>
             </a:pPr>
             <a:r>
-              <a:rPr sz="2100" b="0">
+              <a:rPr sz="2100" b="0" lang="ko-KR" altLang="en-US">
                 <a:solidFill>
                   <a:srgbClr val="1E2A30"/>
                 </a:solidFill>
@@ -6616,7 +6616,7 @@
               </a:lnSpc>
             </a:pPr>
             <a:r>
-              <a:rPr sz="2100" b="0">
+              <a:rPr sz="2100" b="0" lang="ko-KR" altLang="en-US">
                 <a:solidFill>
                   <a:srgbClr val="0E7D6B"/>
                 </a:solidFill>
@@ -6627,7 +6627,7 @@
               <a:t>③ 저장 후 F5</a:t>
             </a:r>
             <a:r>
-              <a:rPr sz="2100" b="0">
+              <a:rPr sz="2100" b="0" lang="ko-KR" altLang="en-US">
                 <a:solidFill>
                   <a:srgbClr val="1E2A30"/>
                 </a:solidFill>
@@ -6645,7 +6645,7 @@
               </a:lnSpc>
             </a:pPr>
             <a:r>
-              <a:rPr sz="2100" b="0">
+              <a:rPr sz="2100" b="0" lang="ko-KR" altLang="en-US">
                 <a:solidFill>
                   <a:srgbClr val="1E2A30"/>
                 </a:solidFill>
@@ -6670,7 +6670,7 @@
               </a:lnSpc>
             </a:pPr>
             <a:r>
-              <a:rPr sz="2100" b="0">
+              <a:rPr sz="2100" b="0" lang="ko-KR" altLang="en-US">
                 <a:solidFill>
                   <a:srgbClr val="1E2A30"/>
                 </a:solidFill>
@@ -6688,7 +6688,7 @@
               </a:lnSpc>
             </a:pPr>
             <a:r>
-              <a:rPr sz="2100" b="0">
+              <a:rPr sz="2100" b="0" lang="ko-KR" altLang="en-US">
                 <a:solidFill>
                   <a:srgbClr val="1E2A30"/>
                 </a:solidFill>
@@ -6771,7 +6771,7 @@
               </a:lnSpc>
             </a:pPr>
             <a:r>
-              <a:rPr sz="2200" b="0">
+              <a:rPr sz="2200" b="0" lang="ko-KR" altLang="en-US">
                 <a:solidFill>
                   <a:srgbClr val="6B7A80"/>
                 </a:solidFill>
@@ -6906,7 +6906,7 @@
               </a:lnSpc>
             </a:pPr>
             <a:r>
-              <a:rPr sz="1250" b="0">
+              <a:rPr sz="1250" b="0" lang="ko-KR" altLang="en-US">
                 <a:solidFill>
                   <a:srgbClr val="003956"/>
                 </a:solidFill>
@@ -6924,7 +6924,7 @@
               </a:lnSpc>
             </a:pPr>
             <a:r>
-              <a:rPr sz="1250" b="0">
+              <a:rPr sz="1250" b="0" lang="ko-KR" altLang="en-US">
                 <a:solidFill>
                   <a:srgbClr val="003956"/>
                 </a:solidFill>
@@ -6965,7 +6965,7 @@
               </a:lnSpc>
             </a:pPr>
             <a:r>
-              <a:rPr sz="1600" b="0">
+              <a:rPr sz="1600" b="0" lang="ko-KR" altLang="en-US">
                 <a:solidFill>
                   <a:srgbClr val="96A8A7"/>
                 </a:solidFill>
@@ -7050,7 +7050,7 @@
               </a:lnSpc>
             </a:pPr>
             <a:r>
-              <a:rPr sz="3500" b="0">
+              <a:rPr sz="3500" b="0" lang="ko-KR" altLang="en-US">
                 <a:solidFill>
                   <a:srgbClr val="1E2A30"/>
                 </a:solidFill>
@@ -7133,7 +7133,7 @@
               </a:lnSpc>
             </a:pPr>
             <a:r>
-              <a:rPr sz="2200" b="0">
+              <a:rPr sz="2200" b="0" lang="ko-KR" altLang="en-US">
                 <a:solidFill>
                   <a:srgbClr val="6B7A80"/>
                 </a:solidFill>
@@ -7174,7 +7174,7 @@
               </a:lnSpc>
             </a:pPr>
             <a:r>
-              <a:rPr sz="2100" b="0">
+              <a:rPr sz="2100" b="0" lang="ko-KR" altLang="en-US">
                 <a:solidFill>
                   <a:srgbClr val="6B7A80"/>
                 </a:solidFill>
@@ -7259,7 +7259,7 @@
               </a:lnSpc>
             </a:pPr>
             <a:r>
-              <a:rPr sz="2200" b="0">
+              <a:rPr sz="2200" b="0" lang="ko-KR" altLang="en-US">
                 <a:solidFill>
                   <a:srgbClr val="FFFFFF"/>
                 </a:solidFill>
@@ -7300,7 +7300,7 @@
               </a:lnSpc>
             </a:pPr>
             <a:r>
-              <a:rPr sz="2900" b="0">
+              <a:rPr sz="2900" b="0" lang="ko-KR" altLang="en-US">
                 <a:solidFill>
                   <a:srgbClr val="1E2A30"/>
                 </a:solidFill>
@@ -7385,7 +7385,7 @@
               </a:lnSpc>
             </a:pPr>
             <a:r>
-              <a:rPr sz="2200" b="0">
+              <a:rPr sz="2200" b="0" lang="ko-KR" altLang="en-US">
                 <a:solidFill>
                   <a:srgbClr val="FFFFFF"/>
                 </a:solidFill>
@@ -7426,7 +7426,7 @@
               </a:lnSpc>
             </a:pPr>
             <a:r>
-              <a:rPr sz="2900" b="0">
+              <a:rPr sz="2900" b="0" lang="ko-KR" altLang="en-US">
                 <a:solidFill>
                   <a:srgbClr val="1E2A30"/>
                 </a:solidFill>
@@ -7511,7 +7511,7 @@
               </a:lnSpc>
             </a:pPr>
             <a:r>
-              <a:rPr sz="2200" b="0">
+              <a:rPr sz="2200" b="0" lang="ko-KR" altLang="en-US">
                 <a:solidFill>
                   <a:srgbClr val="FFFFFF"/>
                 </a:solidFill>
@@ -7552,7 +7552,7 @@
               </a:lnSpc>
             </a:pPr>
             <a:r>
-              <a:rPr sz="2900" b="0">
+              <a:rPr sz="2900" b="0" lang="ko-KR" altLang="en-US">
                 <a:solidFill>
                   <a:srgbClr val="1E2A30"/>
                 </a:solidFill>
@@ -7563,7 +7563,7 @@
               <a:t>[Create a main.py welcome script] </a:t>
             </a:r>
             <a:r>
-              <a:rPr sz="2900" b="0">
+              <a:rPr sz="2900" b="0" lang="ko-KR" altLang="en-US">
                 <a:solidFill>
                   <a:srgbClr val="0E7D6B"/>
                 </a:solidFill>
@@ -7648,7 +7648,7 @@
               </a:lnSpc>
             </a:pPr>
             <a:r>
-              <a:rPr sz="2200" b="0">
+              <a:rPr sz="2200" b="0" lang="ko-KR" altLang="en-US">
                 <a:solidFill>
                   <a:srgbClr val="FFFFFF"/>
                 </a:solidFill>
@@ -7689,7 +7689,7 @@
               </a:lnSpc>
             </a:pPr>
             <a:r>
-              <a:rPr sz="2900" b="0">
+              <a:rPr sz="2900" b="0" lang="ko-KR" altLang="en-US">
                 <a:solidFill>
                   <a:srgbClr val="1E2A30"/>
                 </a:solidFill>
@@ -7774,7 +7774,7 @@
               </a:lnSpc>
             </a:pPr>
             <a:r>
-              <a:rPr sz="2200" b="0">
+              <a:rPr sz="2200" b="0" lang="ko-KR" altLang="en-US">
                 <a:solidFill>
                   <a:srgbClr val="FFFFFF"/>
                 </a:solidFill>
@@ -7815,7 +7815,7 @@
               </a:lnSpc>
             </a:pPr>
             <a:r>
-              <a:rPr sz="2900" b="0">
+              <a:rPr sz="2900" b="0" lang="ko-KR" altLang="en-US">
                 <a:solidFill>
                   <a:srgbClr val="1E2A30"/>
                 </a:solidFill>
@@ -7826,7 +7826,7 @@
               <a:t>폴더 우클릭 → [New]→[Python File] → 실행은 </a:t>
             </a:r>
             <a:r>
-              <a:rPr sz="2900" b="0">
+              <a:rPr sz="2900" b="0" lang="ko-KR" altLang="en-US">
                 <a:solidFill>
                   <a:srgbClr val="0E7D6B"/>
                 </a:solidFill>
@@ -7911,7 +7911,7 @@
               </a:lnSpc>
             </a:pPr>
             <a:r>
-              <a:rPr sz="2700" b="0">
+              <a:rPr sz="2700" b="0" lang="ko-KR" altLang="en-US">
                 <a:solidFill>
                   <a:srgbClr val="003956"/>
                 </a:solidFill>
@@ -7952,7 +7952,7 @@
               </a:lnSpc>
             </a:pPr>
             <a:r>
-              <a:rPr sz="2500" b="0">
+              <a:rPr sz="2400" b="0" lang="ko-KR" altLang="en-US">
                 <a:solidFill>
                   <a:srgbClr val="0E7D6B"/>
                 </a:solidFill>
@@ -7963,7 +7963,7 @@
               <a:t>프로젝트 단위로 소스를 관리</a:t>
             </a:r>
             <a:r>
-              <a:rPr sz="2500" b="0">
+              <a:rPr sz="2400" b="0" lang="ko-KR" altLang="en-US">
                 <a:solidFill>
                   <a:srgbClr val="1E2A30"/>
                 </a:solidFill>
@@ -7974,7 +7974,7 @@
               <a:t>하고, 프로젝트마다 </a:t>
             </a:r>
             <a:r>
-              <a:rPr sz="2500" b="0">
+              <a:rPr sz="2400" b="0" lang="ko-KR" altLang="en-US">
                 <a:solidFill>
                   <a:srgbClr val="0E7D6B"/>
                 </a:solidFill>
@@ -7985,7 +7985,7 @@
               <a:t>인터프리터(python.exe)를 연결</a:t>
             </a:r>
             <a:r>
-              <a:rPr sz="2500" b="0">
+              <a:rPr sz="2400" b="0" lang="ko-KR" altLang="en-US">
                 <a:solidFill>
                   <a:srgbClr val="1E2A30"/>
                 </a:solidFill>
@@ -8003,7 +8003,7 @@
               </a:lnSpc>
             </a:pPr>
             <a:r>
-              <a:rPr sz="2500" b="0">
+              <a:rPr sz="2400" b="0" lang="ko-KR" altLang="en-US">
                 <a:solidFill>
                   <a:srgbClr val="1E2A30"/>
                 </a:solidFill>
@@ -8086,7 +8086,7 @@
               </a:lnSpc>
             </a:pPr>
             <a:r>
-              <a:rPr sz="2200" b="0">
+              <a:rPr sz="2200" b="0" lang="ko-KR" altLang="en-US">
                 <a:solidFill>
                   <a:srgbClr val="6B7A80"/>
                 </a:solidFill>
@@ -8221,7 +8221,7 @@
               </a:lnSpc>
             </a:pPr>
             <a:r>
-              <a:rPr sz="1250" b="0">
+              <a:rPr sz="1250" b="0" lang="ko-KR" altLang="en-US">
                 <a:solidFill>
                   <a:srgbClr val="003956"/>
                 </a:solidFill>
@@ -8239,7 +8239,7 @@
               </a:lnSpc>
             </a:pPr>
             <a:r>
-              <a:rPr sz="1250" b="0">
+              <a:rPr sz="1250" b="0" lang="ko-KR" altLang="en-US">
                 <a:solidFill>
                   <a:srgbClr val="003956"/>
                 </a:solidFill>
@@ -8280,7 +8280,7 @@
               </a:lnSpc>
             </a:pPr>
             <a:r>
-              <a:rPr sz="1600" b="0">
+              <a:rPr sz="1600" b="0" lang="ko-KR" altLang="en-US">
                 <a:solidFill>
                   <a:srgbClr val="96A8A7"/>
                 </a:solidFill>
@@ -8365,7 +8365,7 @@
               </a:lnSpc>
             </a:pPr>
             <a:r>
-              <a:rPr sz="3500" b="0">
+              <a:rPr sz="3500" b="0" lang="ko-KR" altLang="en-US">
                 <a:solidFill>
                   <a:srgbClr val="1E2A30"/>
                 </a:solidFill>
@@ -8448,7 +8448,7 @@
               </a:lnSpc>
             </a:pPr>
             <a:r>
-              <a:rPr sz="2200" b="0">
+              <a:rPr sz="2200" b="0" lang="ko-KR" altLang="en-US">
                 <a:solidFill>
                   <a:srgbClr val="6B7A80"/>
                 </a:solidFill>
@@ -8489,7 +8489,7 @@
               </a:lnSpc>
             </a:pPr>
             <a:r>
-              <a:rPr sz="2100" b="0">
+              <a:rPr sz="2100" b="0" lang="ko-KR" altLang="en-US">
                 <a:solidFill>
                   <a:srgbClr val="6B7A80"/>
                 </a:solidFill>
@@ -8644,7 +8644,7 @@
               </a:lnSpc>
             </a:pPr>
             <a:r>
-              <a:rPr sz="2300" b="0">
+              <a:rPr sz="1700" b="0" lang="ko-KR" altLang="en-US">
                 <a:solidFill>
                   <a:srgbClr val="6B7A80"/>
                 </a:solidFill>
@@ -8729,7 +8729,7 @@
               </a:lnSpc>
             </a:pPr>
             <a:r>
-              <a:rPr sz="2700" b="0">
+              <a:rPr sz="2700" b="0" lang="ko-KR" altLang="en-US">
                 <a:solidFill>
                   <a:srgbClr val="003956"/>
                 </a:solidFill>
@@ -8770,7 +8770,7 @@
               </a:lnSpc>
             </a:pPr>
             <a:r>
-              <a:rPr sz="2700" b="0">
+              <a:rPr sz="2500" b="0" lang="ko-KR" altLang="en-US">
                 <a:solidFill>
                   <a:srgbClr val="1E2A30"/>
                 </a:solidFill>
@@ -8788,7 +8788,7 @@
               </a:lnSpc>
             </a:pPr>
             <a:r>
-              <a:rPr sz="2700" b="0">
+              <a:rPr sz="2500" b="0" lang="ko-KR" altLang="en-US">
                 <a:solidFill>
                   <a:srgbClr val="0E7D6B"/>
                 </a:solidFill>
@@ -8813,7 +8813,7 @@
               </a:lnSpc>
             </a:pPr>
             <a:r>
-              <a:rPr sz="2700" b="0">
+              <a:rPr sz="2500" b="0" lang="ko-KR" altLang="en-US">
                 <a:solidFill>
                   <a:srgbClr val="1E2A30"/>
                 </a:solidFill>
@@ -8831,7 +8831,7 @@
               </a:lnSpc>
             </a:pPr>
             <a:r>
-              <a:rPr sz="2700" b="0">
+              <a:rPr sz="2500" b="0" lang="ko-KR" altLang="en-US">
                 <a:solidFill>
                   <a:srgbClr val="1E2A30"/>
                 </a:solidFill>
@@ -8856,7 +8856,7 @@
               </a:lnSpc>
             </a:pPr>
             <a:r>
-              <a:rPr sz="2700" b="0">
+              <a:rPr sz="2500" b="0" lang="ko-KR" altLang="en-US">
                 <a:solidFill>
                   <a:srgbClr val="1E2A30"/>
                 </a:solidFill>
@@ -8874,7 +8874,7 @@
               </a:lnSpc>
             </a:pPr>
             <a:r>
-              <a:rPr sz="2700" b="0">
+              <a:rPr sz="2500" b="0" lang="ko-KR" altLang="en-US">
                 <a:solidFill>
                   <a:srgbClr val="1E2A30"/>
                 </a:solidFill>
@@ -8957,7 +8957,7 @@
               </a:lnSpc>
             </a:pPr>
             <a:r>
-              <a:rPr sz="2200" b="0">
+              <a:rPr sz="2200" b="0" lang="ko-KR" altLang="en-US">
                 <a:solidFill>
                   <a:srgbClr val="6B7A80"/>
                 </a:solidFill>
@@ -8975,7 +8975,7 @@
               </a:lnSpc>
             </a:pPr>
             <a:r>
-              <a:rPr sz="2200" b="0">
+              <a:rPr sz="2200" b="0" lang="ko-KR" altLang="en-US">
                 <a:solidFill>
                   <a:srgbClr val="6B7A80"/>
                 </a:solidFill>
@@ -9110,7 +9110,7 @@
               </a:lnSpc>
             </a:pPr>
             <a:r>
-              <a:rPr sz="1250" b="0">
+              <a:rPr sz="1250" b="0" lang="ko-KR" altLang="en-US">
                 <a:solidFill>
                   <a:srgbClr val="003956"/>
                 </a:solidFill>
@@ -9128,7 +9128,7 @@
               </a:lnSpc>
             </a:pPr>
             <a:r>
-              <a:rPr sz="1250" b="0">
+              <a:rPr sz="1250" b="0" lang="ko-KR" altLang="en-US">
                 <a:solidFill>
                   <a:srgbClr val="003956"/>
                 </a:solidFill>
@@ -9169,7 +9169,7 @@
               </a:lnSpc>
             </a:pPr>
             <a:r>
-              <a:rPr sz="1600" b="0">
+              <a:rPr sz="1600" b="0" lang="ko-KR" altLang="en-US">
                 <a:solidFill>
                   <a:srgbClr val="96A8A7"/>
                 </a:solidFill>
@@ -9254,7 +9254,7 @@
               </a:lnSpc>
             </a:pPr>
             <a:r>
-              <a:rPr sz="3500" b="0">
+              <a:rPr sz="3500" b="0" lang="ko-KR" altLang="en-US">
                 <a:solidFill>
                   <a:srgbClr val="1E2A30"/>
                 </a:solidFill>
@@ -9337,7 +9337,7 @@
               </a:lnSpc>
             </a:pPr>
             <a:r>
-              <a:rPr sz="2200" b="0">
+              <a:rPr sz="2200" b="0" lang="ko-KR" altLang="en-US">
                 <a:solidFill>
                   <a:srgbClr val="6B7A80"/>
                 </a:solidFill>
@@ -9378,7 +9378,7 @@
               </a:lnSpc>
             </a:pPr>
             <a:r>
-              <a:rPr sz="2100" b="0">
+              <a:rPr sz="2100" b="0" lang="ko-KR" altLang="en-US">
                 <a:solidFill>
                   <a:srgbClr val="6B7A80"/>
                 </a:solidFill>
@@ -9463,7 +9463,7 @@
               </a:lnSpc>
             </a:pPr>
             <a:r>
-              <a:rPr sz="2900" b="0">
+              <a:rPr sz="2900" b="0" lang="ko-KR" altLang="en-US">
                 <a:solidFill>
                   <a:srgbClr val="1E2A30"/>
                 </a:solidFill>
@@ -9590,7 +9590,7 @@
               </a:lnSpc>
             </a:pPr>
             <a:r>
-              <a:rPr sz="2900" b="0">
+              <a:rPr sz="2900" b="0" lang="ko-KR" altLang="en-US">
                 <a:solidFill>
                   <a:srgbClr val="1E2A30"/>
                 </a:solidFill>
@@ -9673,7 +9673,7 @@
               </a:lnSpc>
             </a:pPr>
             <a:r>
-              <a:rPr sz="2800" b="0">
+              <a:rPr sz="2800" b="0" lang="ko-KR" altLang="en-US">
                 <a:solidFill>
                   <a:srgbClr val="1E2A30"/>
                 </a:solidFill>
@@ -9714,7 +9714,7 @@
               </a:lnSpc>
             </a:pPr>
             <a:r>
-              <a:rPr sz="2300" b="0">
+              <a:rPr sz="2100" b="0" lang="ko-KR" altLang="en-US">
                 <a:solidFill>
                   <a:srgbClr val="1E2A30"/>
                 </a:solidFill>
@@ -9755,7 +9755,7 @@
               </a:lnSpc>
             </a:pPr>
             <a:r>
-              <a:rPr sz="2800" b="0">
+              <a:rPr sz="2800" b="0" lang="ko-KR" altLang="en-US">
                 <a:solidFill>
                   <a:srgbClr val="1E2A30"/>
                 </a:solidFill>
@@ -9796,7 +9796,7 @@
               </a:lnSpc>
             </a:pPr>
             <a:r>
-              <a:rPr sz="2800" b="0">
+              <a:rPr sz="2800" b="0" lang="ko-KR" altLang="en-US">
                 <a:solidFill>
                   <a:srgbClr val="1E2A30"/>
                 </a:solidFill>
@@ -9883,7 +9883,7 @@
               </a:lnSpc>
             </a:pPr>
             <a:r>
-              <a:rPr sz="2600" b="0">
+              <a:rPr sz="2600" b="0" lang="ko-KR" altLang="en-US">
                 <a:solidFill>
                   <a:srgbClr val="C1662F"/>
                 </a:solidFill>
@@ -9924,7 +9924,7 @@
               </a:lnSpc>
             </a:pPr>
             <a:r>
-              <a:rPr sz="1700" b="0">
+              <a:rPr sz="1700" b="0" lang="ko-KR" altLang="en-US">
                 <a:solidFill>
                   <a:srgbClr val="1E2A30"/>
                 </a:solidFill>
@@ -9935,7 +9935,7 @@
               <a:t>설치할 것은 </a:t>
             </a:r>
             <a:r>
-              <a:rPr sz="1700" b="0">
+              <a:rPr sz="1700" b="0" lang="ko-KR" altLang="en-US">
                 <a:solidFill>
                   <a:srgbClr val="0E7D6B"/>
                 </a:solidFill>
@@ -9946,7 +9946,7 @@
               <a:t>opencv-python</a:t>
             </a:r>
             <a:r>
-              <a:rPr sz="1700" b="0">
+              <a:rPr sz="1700" b="0" lang="ko-KR" altLang="en-US">
                 <a:solidFill>
                   <a:srgbClr val="1E2A30"/>
                 </a:solidFill>
@@ -9964,7 +9964,7 @@
               </a:lnSpc>
             </a:pPr>
             <a:r>
-              <a:rPr sz="1700" b="0">
+              <a:rPr sz="1700" b="0" lang="ko-KR" altLang="en-US">
                 <a:solidFill>
                   <a:srgbClr val="1E2A30"/>
                 </a:solidFill>
@@ -9975,7 +9975,7 @@
               <a:t>opencv-python-</a:t>
             </a:r>
             <a:r>
-              <a:rPr sz="1700" b="0">
+              <a:rPr sz="1700" b="0" lang="ko-KR" altLang="en-US">
                 <a:solidFill>
                   <a:srgbClr val="0E7D6B"/>
                 </a:solidFill>
@@ -9986,7 +9986,7 @@
               <a:t>headless</a:t>
             </a:r>
             <a:r>
-              <a:rPr sz="1700" b="0">
+              <a:rPr sz="1700" b="0" lang="ko-KR" altLang="en-US">
                 <a:solidFill>
                   <a:srgbClr val="1E2A30"/>
                 </a:solidFill>
@@ -10071,7 +10071,7 @@
               </a:lnSpc>
             </a:pPr>
             <a:r>
-              <a:rPr sz="2700" b="0">
+              <a:rPr sz="2700" b="0" lang="ko-KR" altLang="en-US">
                 <a:solidFill>
                   <a:srgbClr val="003956"/>
                 </a:solidFill>
@@ -10112,7 +10112,7 @@
               </a:lnSpc>
             </a:pPr>
             <a:r>
-              <a:rPr sz="2800" b="0">
+              <a:rPr sz="2600" b="0" lang="ko-KR" altLang="en-US">
                 <a:solidFill>
                   <a:srgbClr val="0E7D6B"/>
                 </a:solidFill>
@@ -10123,7 +10123,7 @@
               <a:t>matplotlib</a:t>
             </a:r>
             <a:r>
-              <a:rPr sz="2800" b="0">
+              <a:rPr sz="2600" b="0" lang="ko-KR" altLang="en-US">
                 <a:solidFill>
                   <a:srgbClr val="1E2A30"/>
                 </a:solidFill>
@@ -10134,7 +10134,7 @@
               <a:t> (그래프·영상 표시) · </a:t>
             </a:r>
             <a:r>
-              <a:rPr sz="2800" b="0">
+              <a:rPr sz="2600" b="0" lang="ko-KR" altLang="en-US">
                 <a:solidFill>
                   <a:srgbClr val="0E7D6B"/>
                 </a:solidFill>
@@ -10145,7 +10145,7 @@
               <a:t>numpy</a:t>
             </a:r>
             <a:r>
-              <a:rPr sz="2800" b="0">
+              <a:rPr sz="2600" b="0" lang="ko-KR" altLang="en-US">
                 <a:solidFill>
                   <a:srgbClr val="1E2A30"/>
                 </a:solidFill>
@@ -10228,7 +10228,7 @@
               </a:lnSpc>
             </a:pPr>
             <a:r>
-              <a:rPr sz="2200" b="0">
+              <a:rPr sz="2200" b="0" lang="ko-KR" altLang="en-US">
                 <a:solidFill>
                   <a:srgbClr val="6B7A80"/>
                 </a:solidFill>
@@ -10363,7 +10363,7 @@
               </a:lnSpc>
             </a:pPr>
             <a:r>
-              <a:rPr sz="1250" b="0">
+              <a:rPr sz="1250" b="0" lang="ko-KR" altLang="en-US">
                 <a:solidFill>
                   <a:srgbClr val="003956"/>
                 </a:solidFill>
@@ -10381,7 +10381,7 @@
               </a:lnSpc>
             </a:pPr>
             <a:r>
-              <a:rPr sz="1250" b="0">
+              <a:rPr sz="1250" b="0" lang="ko-KR" altLang="en-US">
                 <a:solidFill>
                   <a:srgbClr val="003956"/>
                 </a:solidFill>
@@ -10422,7 +10422,7 @@
               </a:lnSpc>
             </a:pPr>
             <a:r>
-              <a:rPr sz="1600" b="0">
+              <a:rPr sz="1600" b="0" lang="ko-KR" altLang="en-US">
                 <a:solidFill>
                   <a:srgbClr val="96A8A7"/>
                 </a:solidFill>
@@ -10507,7 +10507,7 @@
               </a:lnSpc>
             </a:pPr>
             <a:r>
-              <a:rPr sz="3500" b="0">
+              <a:rPr sz="3500" b="0" lang="ko-KR" altLang="en-US">
                 <a:solidFill>
                   <a:srgbClr val="1E2A30"/>
                 </a:solidFill>
@@ -10590,7 +10590,7 @@
               </a:lnSpc>
             </a:pPr>
             <a:r>
-              <a:rPr sz="2200" b="0">
+              <a:rPr sz="2200" b="0" lang="ko-KR" altLang="en-US">
                 <a:solidFill>
                   <a:srgbClr val="6B7A80"/>
                 </a:solidFill>
@@ -10631,7 +10631,7 @@
               </a:lnSpc>
             </a:pPr>
             <a:r>
-              <a:rPr sz="2100" b="0">
+              <a:rPr sz="2100" b="0" lang="ko-KR" altLang="en-US">
                 <a:solidFill>
                   <a:srgbClr val="6B7A80"/>
                 </a:solidFill>
@@ -10786,7 +10786,7 @@
               </a:lnSpc>
             </a:pPr>
             <a:r>
-              <a:rPr sz="2300" b="0">
+              <a:rPr sz="1900" b="0" lang="ko-KR" altLang="en-US">
                 <a:solidFill>
                   <a:srgbClr val="6B7A80"/>
                 </a:solidFill>
@@ -10871,7 +10871,7 @@
               </a:lnSpc>
             </a:pPr>
             <a:r>
-              <a:rPr sz="2700" b="0">
+              <a:rPr sz="2700" b="0" lang="ko-KR" altLang="en-US">
                 <a:solidFill>
                   <a:srgbClr val="003956"/>
                 </a:solidFill>
@@ -10912,7 +10912,7 @@
               </a:lnSpc>
             </a:pPr>
             <a:r>
-              <a:rPr sz="2100" b="0">
+              <a:rPr sz="2100" b="0" lang="ko-KR" altLang="en-US">
                 <a:solidFill>
                   <a:srgbClr val="1E2A30"/>
                 </a:solidFill>
@@ -10923,7 +10923,7 @@
               <a:t>검색창에 </a:t>
             </a:r>
             <a:r>
-              <a:rPr sz="2100" b="0">
+              <a:rPr sz="2100" b="0" lang="ko-KR" altLang="en-US">
                 <a:solidFill>
                   <a:srgbClr val="0E7D6B"/>
                 </a:solidFill>
@@ -10934,7 +10934,7 @@
               <a:t>opencv-py</a:t>
             </a:r>
             <a:r>
-              <a:rPr sz="2100" b="0">
+              <a:rPr sz="2100" b="0" lang="ko-KR" altLang="en-US">
                 <a:solidFill>
                   <a:srgbClr val="1E2A30"/>
                 </a:solidFill>
@@ -10952,7 +10952,7 @@
               </a:lnSpc>
             </a:pPr>
             <a:r>
-              <a:rPr sz="2100" b="0">
+              <a:rPr sz="2100" b="0" lang="ko-KR" altLang="en-US">
                 <a:solidFill>
                   <a:srgbClr val="1E2A30"/>
                 </a:solidFill>
@@ -10977,7 +10977,7 @@
               </a:lnSpc>
             </a:pPr>
             <a:r>
-              <a:rPr sz="2100" b="0">
+              <a:rPr sz="2100" b="0" lang="ko-KR" altLang="en-US">
                 <a:solidFill>
                   <a:srgbClr val="0E7D6B"/>
                 </a:solidFill>
@@ -10988,7 +10988,7 @@
               <a:t>opencv-python</a:t>
             </a:r>
             <a:r>
-              <a:rPr sz="2100" b="0">
+              <a:rPr sz="2100" b="0" lang="ko-KR" altLang="en-US">
                 <a:solidFill>
                   <a:srgbClr val="1E2A30"/>
                 </a:solidFill>
@@ -11006,7 +11006,7 @@
               </a:lnSpc>
             </a:pPr>
             <a:r>
-              <a:rPr sz="2100" b="0">
+              <a:rPr sz="2100" b="0" lang="ko-KR" altLang="en-US">
                 <a:solidFill>
                   <a:srgbClr val="1E2A30"/>
                 </a:solidFill>
@@ -11031,7 +11031,7 @@
               </a:lnSpc>
             </a:pPr>
             <a:r>
-              <a:rPr sz="2100" b="0">
+              <a:rPr sz="2100" b="0" lang="ko-KR" altLang="en-US">
                 <a:solidFill>
                   <a:srgbClr val="1E2A30"/>
                 </a:solidFill>
@@ -11049,7 +11049,7 @@
               </a:lnSpc>
             </a:pPr>
             <a:r>
-              <a:rPr sz="2100" b="0">
+              <a:rPr sz="2100" b="0" lang="ko-KR" altLang="en-US">
                 <a:solidFill>
                   <a:srgbClr val="1E2A30"/>
                 </a:solidFill>
@@ -11074,7 +11074,7 @@
               </a:lnSpc>
             </a:pPr>
             <a:r>
-              <a:rPr sz="2100" b="0">
+              <a:rPr sz="2100" b="0" lang="ko-KR" altLang="en-US">
                 <a:solidFill>
                   <a:srgbClr val="1E2A30"/>
                 </a:solidFill>
@@ -11092,7 +11092,7 @@
               </a:lnSpc>
             </a:pPr>
             <a:r>
-              <a:rPr sz="2100" b="0">
+              <a:rPr sz="2100" b="0" lang="ko-KR" altLang="en-US">
                 <a:solidFill>
                   <a:srgbClr val="1E2A30"/>
                 </a:solidFill>
@@ -11175,7 +11175,7 @@
               </a:lnSpc>
             </a:pPr>
             <a:r>
-              <a:rPr sz="2200" b="0">
+              <a:rPr sz="2200" b="0" lang="ko-KR" altLang="en-US">
                 <a:solidFill>
                   <a:srgbClr val="6B7A80"/>
                 </a:solidFill>
@@ -11193,7 +11193,7 @@
               </a:lnSpc>
             </a:pPr>
             <a:r>
-              <a:rPr sz="2200" b="0">
+              <a:rPr sz="2200" b="0" lang="ko-KR" altLang="en-US">
                 <a:solidFill>
                   <a:srgbClr val="6B7A80"/>
                 </a:solidFill>
@@ -11328,7 +11328,7 @@
               </a:lnSpc>
             </a:pPr>
             <a:r>
-              <a:rPr sz="1250" b="0">
+              <a:rPr sz="1250" b="0" lang="ko-KR" altLang="en-US">
                 <a:solidFill>
                   <a:srgbClr val="003956"/>
                 </a:solidFill>
@@ -11346,7 +11346,7 @@
               </a:lnSpc>
             </a:pPr>
             <a:r>
-              <a:rPr sz="1250" b="0">
+              <a:rPr sz="1250" b="0" lang="ko-KR" altLang="en-US">
                 <a:solidFill>
                   <a:srgbClr val="003956"/>
                 </a:solidFill>
@@ -11387,7 +11387,7 @@
               </a:lnSpc>
             </a:pPr>
             <a:r>
-              <a:rPr sz="1600" b="0">
+              <a:rPr sz="1600" b="0" lang="ko-KR" altLang="en-US">
                 <a:solidFill>
                   <a:srgbClr val="96A8A7"/>
                 </a:solidFill>
@@ -11472,7 +11472,7 @@
               </a:lnSpc>
             </a:pPr>
             <a:r>
-              <a:rPr sz="3500" b="0">
+              <a:rPr sz="3500" b="0" lang="ko-KR" altLang="en-US">
                 <a:solidFill>
                   <a:srgbClr val="1E2A30"/>
                 </a:solidFill>
@@ -11555,7 +11555,7 @@
               </a:lnSpc>
             </a:pPr>
             <a:r>
-              <a:rPr sz="2200" b="0">
+              <a:rPr sz="2200" b="0" lang="ko-KR" altLang="en-US">
                 <a:solidFill>
                   <a:srgbClr val="6B7A80"/>
                 </a:solidFill>
@@ -11596,7 +11596,7 @@
               </a:lnSpc>
             </a:pPr>
             <a:r>
-              <a:rPr sz="2100" b="0">
+              <a:rPr sz="2100" b="0" lang="ko-KR" altLang="en-US">
                 <a:solidFill>
                   <a:srgbClr val="6B7A80"/>
                 </a:solidFill>
@@ -11681,7 +11681,7 @@
               </a:lnSpc>
             </a:pPr>
             <a:r>
-              <a:rPr sz="1300" b="0">
+              <a:rPr sz="1300" b="0" lang="ko-KR" altLang="en-US">
                 <a:solidFill>
                   <a:srgbClr val="96A8A7"/>
                 </a:solidFill>
@@ -11969,7 +11969,7 @@
               </a:lnSpc>
             </a:pPr>
             <a:r>
-              <a:rPr sz="2700" b="0">
+              <a:rPr sz="2700" b="0" lang="ko-KR" altLang="en-US">
                 <a:solidFill>
                   <a:srgbClr val="003956"/>
                 </a:solidFill>
@@ -12010,7 +12010,7 @@
               </a:lnSpc>
             </a:pPr>
             <a:r>
-              <a:rPr sz="1700" b="0">
+              <a:rPr sz="1700" b="0" lang="ko-KR" altLang="en-US">
                 <a:solidFill>
                   <a:srgbClr val="0E7D6B"/>
                 </a:solidFill>
@@ -12021,7 +12021,7 @@
               <a:t>zeros</a:t>
             </a:r>
             <a:r>
-              <a:rPr sz="1700" b="0">
+              <a:rPr sz="1700" b="0" lang="ko-KR" altLang="en-US">
                 <a:solidFill>
                   <a:srgbClr val="1E2A30"/>
                 </a:solidFill>
@@ -12039,7 +12039,7 @@
               </a:lnSpc>
             </a:pPr>
             <a:r>
-              <a:rPr sz="1700" b="0">
+              <a:rPr sz="1700" b="0" lang="ko-KR" altLang="en-US">
                 <a:solidFill>
                   <a:srgbClr val="1E2A30"/>
                 </a:solidFill>
@@ -12064,7 +12064,7 @@
               </a:lnSpc>
             </a:pPr>
             <a:r>
-              <a:rPr sz="1700" b="0">
+              <a:rPr sz="1700" b="0" lang="ko-KR" altLang="en-US">
                 <a:solidFill>
                   <a:srgbClr val="0E7D6B"/>
                 </a:solidFill>
@@ -12075,7 +12075,7 @@
               <a:t>fill(200)</a:t>
             </a:r>
             <a:r>
-              <a:rPr sz="1700" b="0">
+              <a:rPr sz="1700" b="0" lang="ko-KR" altLang="en-US">
                 <a:solidFill>
                   <a:srgbClr val="1E2A30"/>
                 </a:solidFill>
@@ -12093,7 +12093,7 @@
               </a:lnSpc>
             </a:pPr>
             <a:r>
-              <a:rPr sz="1700" b="0">
+              <a:rPr sz="1700" b="0" lang="ko-KR" altLang="en-US">
                 <a:solidFill>
                   <a:srgbClr val="1E2A30"/>
                 </a:solidFill>
@@ -12118,7 +12118,7 @@
               </a:lnSpc>
             </a:pPr>
             <a:r>
-              <a:rPr sz="1700" b="0">
+              <a:rPr sz="1700" b="0" lang="ko-KR" altLang="en-US">
                 <a:solidFill>
                   <a:srgbClr val="0E7D6B"/>
                 </a:solidFill>
@@ -12129,7 +12129,7 @@
               <a:t>imshow</a:t>
             </a:r>
             <a:r>
-              <a:rPr sz="1700" b="0">
+              <a:rPr sz="1700" b="0" lang="ko-KR" altLang="en-US">
                 <a:solidFill>
                   <a:srgbClr val="1E2A30"/>
                 </a:solidFill>
@@ -12147,7 +12147,7 @@
               </a:lnSpc>
             </a:pPr>
             <a:r>
-              <a:rPr sz="1700" b="0">
+              <a:rPr sz="1700" b="0" lang="ko-KR" altLang="en-US">
                 <a:solidFill>
                   <a:srgbClr val="1E2A30"/>
                 </a:solidFill>
@@ -12172,7 +12172,7 @@
               </a:lnSpc>
             </a:pPr>
             <a:r>
-              <a:rPr sz="1700" b="0">
+              <a:rPr sz="1700" b="0" lang="ko-KR" altLang="en-US">
                 <a:solidFill>
                   <a:srgbClr val="0E7D6B"/>
                 </a:solidFill>
@@ -12183,7 +12183,7 @@
               <a:t>waitKey(0)</a:t>
             </a:r>
             <a:r>
-              <a:rPr sz="1700" b="0">
+              <a:rPr sz="1700" b="0" lang="ko-KR" altLang="en-US">
                 <a:solidFill>
                   <a:srgbClr val="1E2A30"/>
                 </a:solidFill>
@@ -12201,7 +12201,7 @@
               </a:lnSpc>
             </a:pPr>
             <a:r>
-              <a:rPr sz="1700" b="0">
+              <a:rPr sz="1700" b="0" lang="ko-KR" altLang="en-US">
                 <a:solidFill>
                   <a:srgbClr val="1E2A30"/>
                 </a:solidFill>
@@ -12286,7 +12286,7 @@
               </a:lnSpc>
             </a:pPr>
             <a:r>
-              <a:rPr sz="2700" b="0">
+              <a:rPr sz="2700" b="0" lang="ko-KR" altLang="en-US">
                 <a:solidFill>
                   <a:srgbClr val="003956"/>
                 </a:solidFill>
@@ -12327,7 +12327,7 @@
               </a:lnSpc>
             </a:pPr>
             <a:r>
-              <a:rPr sz="1700" b="0">
+              <a:rPr sz="1600" b="0" lang="ko-KR" altLang="en-US">
                 <a:solidFill>
                   <a:srgbClr val="1E2A30"/>
                 </a:solidFill>
@@ -12338,7 +12338,7 @@
               <a:t>영상 = 행렬(np.zeros), 처리 = 행렬 연산(fill), np.uint8이 바로 </a:t>
             </a:r>
             <a:r>
-              <a:rPr sz="1700" b="0">
+              <a:rPr sz="1600" b="0" lang="ko-KR" altLang="en-US">
                 <a:solidFill>
                   <a:srgbClr val="0E7D6B"/>
                 </a:solidFill>
@@ -12349,7 +12349,7 @@
               <a:t>8비트 양자화(0~255)</a:t>
             </a:r>
             <a:r>
-              <a:rPr sz="1700" b="0">
+              <a:rPr sz="1600" b="0" lang="ko-KR" altLang="en-US">
                 <a:solidFill>
                   <a:srgbClr val="1E2A30"/>
                 </a:solidFill>
@@ -12484,7 +12484,7 @@
               </a:lnSpc>
             </a:pPr>
             <a:r>
-              <a:rPr sz="1250" b="0">
+              <a:rPr sz="1250" b="0" lang="ko-KR" altLang="en-US">
                 <a:solidFill>
                   <a:srgbClr val="003956"/>
                 </a:solidFill>
@@ -12502,7 +12502,7 @@
               </a:lnSpc>
             </a:pPr>
             <a:r>
-              <a:rPr sz="1250" b="0">
+              <a:rPr sz="1250" b="0" lang="ko-KR" altLang="en-US">
                 <a:solidFill>
                   <a:srgbClr val="003956"/>
                 </a:solidFill>
@@ -12543,7 +12543,7 @@
               </a:lnSpc>
             </a:pPr>
             <a:r>
-              <a:rPr sz="1600" b="0">
+              <a:rPr sz="1600" b="0" lang="ko-KR" altLang="en-US">
                 <a:solidFill>
                   <a:srgbClr val="96A8A7"/>
                 </a:solidFill>
@@ -12628,7 +12628,7 @@
               </a:lnSpc>
             </a:pPr>
             <a:r>
-              <a:rPr sz="3500" b="0">
+              <a:rPr sz="3500" b="0" lang="ko-KR" altLang="en-US">
                 <a:solidFill>
                   <a:srgbClr val="1E2A30"/>
                 </a:solidFill>
@@ -12711,7 +12711,7 @@
               </a:lnSpc>
             </a:pPr>
             <a:r>
-              <a:rPr sz="2200" b="0">
+              <a:rPr sz="2200" b="0" lang="ko-KR" altLang="en-US">
                 <a:solidFill>
                   <a:srgbClr val="6B7A80"/>
                 </a:solidFill>
@@ -12752,7 +12752,7 @@
               </a:lnSpc>
             </a:pPr>
             <a:r>
-              <a:rPr sz="2100" b="0">
+              <a:rPr sz="2100" b="0" lang="ko-KR" altLang="en-US">
                 <a:solidFill>
                   <a:srgbClr val="6B7A80"/>
                 </a:solidFill>
@@ -12837,7 +12837,7 @@
               </a:lnSpc>
             </a:pPr>
             <a:r>
-              <a:rPr sz="4500" b="0">
+              <a:rPr sz="4500" b="0" lang="ko-KR" altLang="en-US">
                 <a:solidFill>
                   <a:srgbClr val="0E7D6B"/>
                 </a:solidFill>
@@ -12878,7 +12878,7 @@
               </a:lnSpc>
             </a:pPr>
             <a:r>
-              <a:rPr sz="2800" b="0">
+              <a:rPr sz="2800" b="0" lang="ko-KR" altLang="en-US">
                 <a:solidFill>
                   <a:srgbClr val="1E2A30"/>
                 </a:solidFill>
@@ -12963,7 +12963,7 @@
               </a:lnSpc>
             </a:pPr>
             <a:r>
-              <a:rPr sz="4500" b="0">
+              <a:rPr sz="4500" b="0" lang="ko-KR" altLang="en-US">
                 <a:solidFill>
                   <a:srgbClr val="0E7D6B"/>
                 </a:solidFill>
@@ -13004,7 +13004,7 @@
               </a:lnSpc>
             </a:pPr>
             <a:r>
-              <a:rPr sz="2800" b="0">
+              <a:rPr sz="2800" b="0" lang="ko-KR" altLang="en-US">
                 <a:solidFill>
                   <a:srgbClr val="1E2A30"/>
                 </a:solidFill>
@@ -13089,7 +13089,7 @@
               </a:lnSpc>
             </a:pPr>
             <a:r>
-              <a:rPr sz="4500" b="0">
+              <a:rPr sz="4500" b="0" lang="ko-KR" altLang="en-US">
                 <a:solidFill>
                   <a:srgbClr val="0E7D6B"/>
                 </a:solidFill>
@@ -13130,7 +13130,7 @@
               </a:lnSpc>
             </a:pPr>
             <a:r>
-              <a:rPr sz="2800" b="0">
+              <a:rPr sz="2800" b="0" lang="ko-KR" altLang="en-US">
                 <a:solidFill>
                   <a:srgbClr val="1E2A30"/>
                 </a:solidFill>
@@ -13215,7 +13215,7 @@
               </a:lnSpc>
             </a:pPr>
             <a:r>
-              <a:rPr sz="4500" b="0">
+              <a:rPr sz="4500" b="0" lang="ko-KR" altLang="en-US">
                 <a:solidFill>
                   <a:srgbClr val="0E7D6B"/>
                 </a:solidFill>
@@ -13256,7 +13256,7 @@
               </a:lnSpc>
             </a:pPr>
             <a:r>
-              <a:rPr sz="2800" b="0">
+              <a:rPr sz="2800" b="0" lang="ko-KR" altLang="en-US">
                 <a:solidFill>
                   <a:srgbClr val="1E2A30"/>
                 </a:solidFill>
@@ -13391,7 +13391,7 @@
               </a:lnSpc>
             </a:pPr>
             <a:r>
-              <a:rPr sz="1250" b="0">
+              <a:rPr sz="1250" b="0" lang="ko-KR" altLang="en-US">
                 <a:solidFill>
                   <a:srgbClr val="003956"/>
                 </a:solidFill>
@@ -13409,7 +13409,7 @@
               </a:lnSpc>
             </a:pPr>
             <a:r>
-              <a:rPr sz="1250" b="0">
+              <a:rPr sz="1250" b="0" lang="ko-KR" altLang="en-US">
                 <a:solidFill>
                   <a:srgbClr val="003956"/>
                 </a:solidFill>
@@ -13450,7 +13450,7 @@
               </a:lnSpc>
             </a:pPr>
             <a:r>
-              <a:rPr sz="1600" b="0">
+              <a:rPr sz="1600" b="0" lang="ko-KR" altLang="en-US">
                 <a:solidFill>
                   <a:srgbClr val="96A8A7"/>
                 </a:solidFill>
@@ -13535,7 +13535,7 @@
               </a:lnSpc>
             </a:pPr>
             <a:r>
-              <a:rPr sz="3500" b="0">
+              <a:rPr sz="3500" b="0" lang="ko-KR" altLang="en-US">
                 <a:solidFill>
                   <a:srgbClr val="1E2A30"/>
                 </a:solidFill>
@@ -13618,7 +13618,7 @@
               </a:lnSpc>
             </a:pPr>
             <a:r>
-              <a:rPr sz="2100" b="0">
+              <a:rPr sz="2100" b="0" lang="ko-KR" altLang="en-US">
                 <a:solidFill>
                   <a:srgbClr val="6B7A80"/>
                 </a:solidFill>
@@ -13703,7 +13703,7 @@
               </a:lnSpc>
             </a:pPr>
             <a:r>
-              <a:rPr sz="2200" b="0">
+              <a:rPr sz="2200" b="0" lang="ko-KR" altLang="en-US">
                 <a:solidFill>
                   <a:srgbClr val="FFFFFF"/>
                 </a:solidFill>
@@ -13744,7 +13744,7 @@
               </a:lnSpc>
             </a:pPr>
             <a:r>
-              <a:rPr sz="2200" b="0">
+              <a:rPr sz="2200" b="0" lang="ko-KR" altLang="en-US">
                 <a:solidFill>
                   <a:srgbClr val="1E2A30"/>
                 </a:solidFill>
@@ -13755,7 +13755,7 @@
               <a:t>교재는 </a:t>
             </a:r>
             <a:r>
-              <a:rPr sz="2200" b="0">
+              <a:rPr sz="2200" b="0" lang="ko-KR" altLang="en-US">
                 <a:solidFill>
                   <a:srgbClr val="0E7D6B"/>
                 </a:solidFill>
@@ -13766,7 +13766,7 @@
               <a:t>수업 진도에 맞춘 참고용</a:t>
             </a:r>
             <a:r>
-              <a:rPr sz="2200" b="0">
+              <a:rPr sz="2200" b="0" lang="ko-KR" altLang="en-US">
                 <a:solidFill>
                   <a:srgbClr val="1E2A30"/>
                 </a:solidFill>
@@ -13851,7 +13851,7 @@
               </a:lnSpc>
             </a:pPr>
             <a:r>
-              <a:rPr sz="2200" b="0">
+              <a:rPr sz="2200" b="0" lang="ko-KR" altLang="en-US">
                 <a:solidFill>
                   <a:srgbClr val="FFFFFF"/>
                 </a:solidFill>
@@ -13892,7 +13892,7 @@
               </a:lnSpc>
             </a:pPr>
             <a:r>
-              <a:rPr sz="2100" b="0">
+              <a:rPr sz="2100" b="0" lang="ko-KR" altLang="en-US">
                 <a:solidFill>
                   <a:srgbClr val="1E2A30"/>
                 </a:solidFill>
@@ -13903,7 +13903,7 @@
               <a:t>교재의 그림·내용 일부를 </a:t>
             </a:r>
             <a:r>
-              <a:rPr sz="2100" b="0">
+              <a:rPr sz="2100" b="0" lang="ko-KR" altLang="en-US">
                 <a:solidFill>
                   <a:srgbClr val="0E7D6B"/>
                 </a:solidFill>
@@ -13914,7 +13914,7 @@
               <a:t>저작권법 제28조(공표된 저작물의 인용)</a:t>
             </a:r>
             <a:r>
-              <a:rPr sz="2100" b="0">
+              <a:rPr sz="2100" b="0" lang="ko-KR" altLang="en-US">
                 <a:solidFill>
                   <a:srgbClr val="1E2A30"/>
                 </a:solidFill>
@@ -13999,7 +13999,7 @@
               </a:lnSpc>
             </a:pPr>
             <a:r>
-              <a:rPr sz="2200" b="0">
+              <a:rPr sz="2200" b="0" lang="ko-KR" altLang="en-US">
                 <a:solidFill>
                   <a:srgbClr val="FFFFFF"/>
                 </a:solidFill>
@@ -14040,7 +14040,7 @@
               </a:lnSpc>
             </a:pPr>
             <a:r>
-              <a:rPr sz="2900" b="0">
+              <a:rPr sz="2100" b="0" lang="ko-KR" altLang="en-US">
                 <a:solidFill>
                   <a:srgbClr val="1E2A30"/>
                 </a:solidFill>
@@ -14048,10 +14048,10 @@
                 <a:ea typeface="프리젠테이션 5 Medium"/>
                 <a:cs typeface="프리젠테이션 5 Medium"/>
               </a:rPr>
-              <a:t>도표·그래프·예시 그림은 교재 것을 쓰지 않고 </a:t>
-            </a:r>
-            <a:r>
-              <a:rPr sz="2900" b="0">
+              <a:t>도표·그래프·예시 그림은 </a:t>
+            </a:r>
+            <a:r>
+              <a:rPr sz="2100" b="0" lang="ko-KR" altLang="en-US">
                 <a:solidFill>
                   <a:srgbClr val="0E7D6B"/>
                 </a:solidFill>
@@ -14059,10 +14059,10 @@
                 <a:ea typeface="프리젠테이션 5 Medium"/>
                 <a:cs typeface="프리젠테이션 5 Medium"/>
               </a:rPr>
-              <a:t>전부 직접 제작</a:t>
-            </a:r>
-            <a:r>
-              <a:rPr sz="2900" b="0">
+              <a:t>직접 제작</a:t>
+            </a:r>
+            <a:r>
+              <a:rPr sz="2100" b="0" lang="ko-KR" altLang="en-US">
                 <a:solidFill>
                   <a:srgbClr val="1E2A30"/>
                 </a:solidFill>
@@ -14070,7 +14070,7 @@
                 <a:ea typeface="프리젠테이션 5 Medium"/>
                 <a:cs typeface="프리젠테이션 5 Medium"/>
               </a:rPr>
-              <a:t>했다</a:t>
+              <a:t>하는 것을 원칙으로 하고, 교재 그림을 그대로 쓴 경우에는 캡션에 인용임을 밝혔다</a:t>
             </a:r>
           </a:p>
         </p:txBody>
@@ -14149,7 +14149,7 @@
               </a:lnSpc>
             </a:pPr>
             <a:r>
-              <a:rPr sz="2600" b="0">
+              <a:rPr sz="2600" b="0" lang="ko-KR" altLang="en-US">
                 <a:solidFill>
                   <a:srgbClr val="C1662F"/>
                 </a:solidFill>
@@ -14190,7 +14190,7 @@
               </a:lnSpc>
             </a:pPr>
             <a:r>
-              <a:rPr sz="1900" b="0">
+              <a:rPr sz="1900" b="0" lang="ko-KR" altLang="en-US">
                 <a:solidFill>
                   <a:srgbClr val="1E2A30"/>
                 </a:solidFill>
@@ -14201,7 +14201,7 @@
               <a:t>이 자료는 </a:t>
             </a:r>
             <a:r>
-              <a:rPr sz="1900" b="0">
+              <a:rPr sz="1900" b="0" lang="ko-KR" altLang="en-US">
                 <a:solidFill>
                   <a:srgbClr val="0E7D6B"/>
                 </a:solidFill>
@@ -14212,7 +14212,7 @@
               <a:t>대학원 개인 학습·연구 목적</a:t>
             </a:r>
             <a:r>
-              <a:rPr sz="1900" b="0">
+              <a:rPr sz="1900" b="0" lang="ko-KR" altLang="en-US">
                 <a:solidFill>
                   <a:srgbClr val="1E2A30"/>
                 </a:solidFill>
@@ -14230,7 +14230,7 @@
               </a:lnSpc>
             </a:pPr>
             <a:r>
-              <a:rPr sz="1900" b="0">
+              <a:rPr sz="1900" b="0" lang="ko-KR" altLang="en-US">
                 <a:solidFill>
                   <a:srgbClr val="1E2A30"/>
                 </a:solidFill>
@@ -14315,7 +14315,7 @@
               </a:lnSpc>
             </a:pPr>
             <a:r>
-              <a:rPr sz="2700" b="0">
+              <a:rPr sz="2700" b="0" lang="ko-KR" altLang="en-US">
                 <a:solidFill>
                   <a:srgbClr val="003956"/>
                 </a:solidFill>
@@ -14356,7 +14356,7 @@
               </a:lnSpc>
             </a:pPr>
             <a:r>
-              <a:rPr sz="2300" b="0">
+              <a:rPr sz="2200" b="0" lang="ko-KR" altLang="en-US">
                 <a:solidFill>
                   <a:srgbClr val="1E2A30"/>
                 </a:solidFill>
@@ -14364,7 +14364,7 @@
                 <a:ea typeface="프리젠테이션 5 Medium"/>
                 <a:cs typeface="프리젠테이션 5 Medium"/>
               </a:rPr>
-              <a:t>정성환·배종욱, 『OpenCV-Python으로 배우는 영상 처리 및 응용』, 생능출판사  ·  수업 자료(CH01~03)</a:t>
+              <a:t>정성환·배종욱, 『OpenCV-Python으로 배우는 영상 처리 및 응용』, 생능출판사  ·  수업 자료(CH01~04)</a:t>
             </a:r>
           </a:p>
         </p:txBody>
@@ -14423,7 +14423,7 @@
               </a:lnSpc>
             </a:pPr>
             <a:r>
-              <a:rPr sz="10100" b="0">
+              <a:rPr sz="10100" b="0" lang="ko-KR" altLang="en-US">
                 <a:solidFill>
                   <a:srgbClr val="2E5A75"/>
                 </a:solidFill>
@@ -14506,7 +14506,7 @@
               </a:lnSpc>
             </a:pPr>
             <a:r>
-              <a:rPr sz="5500" b="0">
+              <a:rPr sz="5500" b="0" lang="ko-KR" altLang="en-US">
                 <a:solidFill>
                   <a:srgbClr val="FFFFFF"/>
                 </a:solidFill>
@@ -14547,7 +14547,7 @@
               </a:lnSpc>
             </a:pPr>
             <a:r>
-              <a:rPr sz="2600" b="0">
+              <a:rPr sz="2600" b="0" lang="ko-KR" altLang="en-US">
                 <a:solidFill>
                   <a:srgbClr val="96A8A7"/>
                 </a:solidFill>
@@ -14588,7 +14588,7 @@
               </a:lnSpc>
             </a:pPr>
             <a:r>
-              <a:rPr sz="2600" b="0">
+              <a:rPr sz="2600" b="0" lang="ko-KR" altLang="en-US">
                 <a:solidFill>
                   <a:srgbClr val="B9C8D2"/>
                 </a:solidFill>
@@ -14629,7 +14629,7 @@
               </a:lnSpc>
             </a:pPr>
             <a:r>
-              <a:rPr sz="2600" b="0">
+              <a:rPr sz="2600" b="0" lang="ko-KR" altLang="en-US">
                 <a:solidFill>
                   <a:srgbClr val="B9C8D2"/>
                 </a:solidFill>
@@ -14670,7 +14670,7 @@
               </a:lnSpc>
             </a:pPr>
             <a:r>
-              <a:rPr sz="2600" b="0">
+              <a:rPr sz="2600" b="0" lang="ko-KR" altLang="en-US">
                 <a:solidFill>
                   <a:srgbClr val="B9C8D2"/>
                 </a:solidFill>
@@ -14805,7 +14805,7 @@
               </a:lnSpc>
             </a:pPr>
             <a:r>
-              <a:rPr sz="1250" b="0">
+              <a:rPr sz="1250" b="0" lang="ko-KR" altLang="en-US">
                 <a:solidFill>
                   <a:srgbClr val="003956"/>
                 </a:solidFill>
@@ -14823,7 +14823,7 @@
               </a:lnSpc>
             </a:pPr>
             <a:r>
-              <a:rPr sz="1250" b="0">
+              <a:rPr sz="1250" b="0" lang="ko-KR" altLang="en-US">
                 <a:solidFill>
                   <a:srgbClr val="003956"/>
                 </a:solidFill>
@@ -14864,7 +14864,7 @@
               </a:lnSpc>
             </a:pPr>
             <a:r>
-              <a:rPr sz="1600" b="0">
+              <a:rPr sz="1600" b="0" lang="ko-KR" altLang="en-US">
                 <a:solidFill>
                   <a:srgbClr val="96A8A7"/>
                 </a:solidFill>
@@ -14949,7 +14949,7 @@
               </a:lnSpc>
             </a:pPr>
             <a:r>
-              <a:rPr sz="3500" b="0">
+              <a:rPr sz="3500" b="0" lang="ko-KR" altLang="en-US">
                 <a:solidFill>
                   <a:srgbClr val="1E2A30"/>
                 </a:solidFill>
@@ -15032,7 +15032,7 @@
               </a:lnSpc>
             </a:pPr>
             <a:r>
-              <a:rPr sz="2200" b="0">
+              <a:rPr sz="2200" b="0" lang="ko-KR" altLang="en-US">
                 <a:solidFill>
                   <a:srgbClr val="6B7A80"/>
                 </a:solidFill>
@@ -15073,7 +15073,7 @@
               </a:lnSpc>
             </a:pPr>
             <a:r>
-              <a:rPr sz="2100" b="0">
+              <a:rPr sz="2100" b="0" lang="ko-KR" altLang="en-US">
                 <a:solidFill>
                   <a:srgbClr val="6B7A80"/>
                 </a:solidFill>
@@ -15158,7 +15158,7 @@
               </a:lnSpc>
             </a:pPr>
             <a:r>
-              <a:rPr sz="2200" b="0">
+              <a:rPr sz="2200" b="0" lang="ko-KR" altLang="en-US">
                 <a:solidFill>
                   <a:srgbClr val="FFFFFF"/>
                 </a:solidFill>
@@ -15199,7 +15199,7 @@
               </a:lnSpc>
             </a:pPr>
             <a:r>
-              <a:rPr sz="2900" b="0">
+              <a:rPr sz="2900" b="0" lang="ko-KR" altLang="en-US">
                 <a:solidFill>
                   <a:srgbClr val="1E2A30"/>
                 </a:solidFill>
@@ -15210,7 +15210,7 @@
               <a:t>OpenCV가 </a:t>
             </a:r>
             <a:r>
-              <a:rPr sz="2900" b="0">
+              <a:rPr sz="2900" b="0" lang="ko-KR" altLang="en-US">
                 <a:solidFill>
                   <a:srgbClr val="0E7D6B"/>
                 </a:solidFill>
@@ -15221,7 +15221,7 @@
               <a:t>무엇이고 왜 표준 도구</a:t>
             </a:r>
             <a:r>
-              <a:rPr sz="2900" b="0">
+              <a:rPr sz="2900" b="0" lang="ko-KR" altLang="en-US">
                 <a:solidFill>
                   <a:srgbClr val="1E2A30"/>
                 </a:solidFill>
@@ -15306,7 +15306,7 @@
               </a:lnSpc>
             </a:pPr>
             <a:r>
-              <a:rPr sz="2200" b="0">
+              <a:rPr sz="2200" b="0" lang="ko-KR" altLang="en-US">
                 <a:solidFill>
                   <a:srgbClr val="FFFFFF"/>
                 </a:solidFill>
@@ -15347,7 +15347,7 @@
               </a:lnSpc>
             </a:pPr>
             <a:r>
-              <a:rPr sz="2900" b="0">
+              <a:rPr sz="2900" b="0" lang="ko-KR" altLang="en-US">
                 <a:solidFill>
                   <a:srgbClr val="1E2A30"/>
                 </a:solidFill>
@@ -15358,7 +15358,7 @@
               <a:t>파이썬이 영상처리 실험에 </a:t>
             </a:r>
             <a:r>
-              <a:rPr sz="2900" b="0">
+              <a:rPr sz="2900" b="0" lang="ko-KR" altLang="en-US">
                 <a:solidFill>
                   <a:srgbClr val="0E7D6B"/>
                 </a:solidFill>
@@ -15369,7 +15369,7 @@
               <a:t>왜 적합한지</a:t>
             </a:r>
             <a:r>
-              <a:rPr sz="2900" b="0">
+              <a:rPr sz="2900" b="0" lang="ko-KR" altLang="en-US">
                 <a:solidFill>
                   <a:srgbClr val="1E2A30"/>
                 </a:solidFill>
@@ -15454,7 +15454,7 @@
               </a:lnSpc>
             </a:pPr>
             <a:r>
-              <a:rPr sz="2200" b="0">
+              <a:rPr sz="2200" b="0" lang="ko-KR" altLang="en-US">
                 <a:solidFill>
                   <a:srgbClr val="FFFFFF"/>
                 </a:solidFill>
@@ -15495,7 +15495,7 @@
               </a:lnSpc>
             </a:pPr>
             <a:r>
-              <a:rPr sz="2900" b="0">
+              <a:rPr sz="2900" b="0" lang="ko-KR" altLang="en-US">
                 <a:solidFill>
                   <a:srgbClr val="1E2A30"/>
                 </a:solidFill>
@@ -15506,7 +15506,7 @@
               <a:t>개발 환경을 직접 구축하고 </a:t>
             </a:r>
             <a:r>
-              <a:rPr sz="2900" b="0">
+              <a:rPr sz="2900" b="0" lang="ko-KR" altLang="en-US">
                 <a:solidFill>
                   <a:srgbClr val="0E7D6B"/>
                 </a:solidFill>
@@ -15517,7 +15517,7 @@
               <a:t>첫 OpenCV 프로그램</a:t>
             </a:r>
             <a:r>
-              <a:rPr sz="2900" b="0">
+              <a:rPr sz="2900" b="0" lang="ko-KR" altLang="en-US">
                 <a:solidFill>
                   <a:srgbClr val="1E2A30"/>
                 </a:solidFill>
@@ -15602,7 +15602,7 @@
               </a:lnSpc>
             </a:pPr>
             <a:r>
-              <a:rPr sz="2700" b="0">
+              <a:rPr sz="2700" b="0" lang="ko-KR" altLang="en-US">
                 <a:solidFill>
                   <a:srgbClr val="003956"/>
                 </a:solidFill>
@@ -15643,7 +15643,7 @@
               </a:lnSpc>
             </a:pPr>
             <a:r>
-              <a:rPr sz="2900" b="0">
+              <a:rPr sz="2900" b="0" lang="ko-KR" altLang="en-US">
                 <a:solidFill>
                   <a:srgbClr val="1E2A30"/>
                 </a:solidFill>
@@ -15661,7 +15661,7 @@
               </a:lnSpc>
             </a:pPr>
             <a:r>
-              <a:rPr sz="2900" b="0">
+              <a:rPr sz="2900" b="0" lang="ko-KR" altLang="en-US">
                 <a:solidFill>
                   <a:srgbClr val="0E7D6B"/>
                 </a:solidFill>
@@ -15672,7 +15672,7 @@
               <a:t>회색 창 하나를 띄우는 코드</a:t>
             </a:r>
             <a:r>
-              <a:rPr sz="2900" b="0">
+              <a:rPr sz="2900" b="0" lang="ko-KR" altLang="en-US">
                 <a:solidFill>
                   <a:srgbClr val="1E2A30"/>
                 </a:solidFill>
@@ -15807,7 +15807,7 @@
               </a:lnSpc>
             </a:pPr>
             <a:r>
-              <a:rPr sz="1250" b="0">
+              <a:rPr sz="1250" b="0" lang="ko-KR" altLang="en-US">
                 <a:solidFill>
                   <a:srgbClr val="003956"/>
                 </a:solidFill>
@@ -15825,7 +15825,7 @@
               </a:lnSpc>
             </a:pPr>
             <a:r>
-              <a:rPr sz="1250" b="0">
+              <a:rPr sz="1250" b="0" lang="ko-KR" altLang="en-US">
                 <a:solidFill>
                   <a:srgbClr val="003956"/>
                 </a:solidFill>
@@ -15866,7 +15866,7 @@
               </a:lnSpc>
             </a:pPr>
             <a:r>
-              <a:rPr sz="1600" b="0">
+              <a:rPr sz="1600" b="0" lang="ko-KR" altLang="en-US">
                 <a:solidFill>
                   <a:srgbClr val="96A8A7"/>
                 </a:solidFill>
@@ -15951,7 +15951,7 @@
               </a:lnSpc>
             </a:pPr>
             <a:r>
-              <a:rPr sz="3500" b="0">
+              <a:rPr sz="3500" b="0" lang="ko-KR" altLang="en-US">
                 <a:solidFill>
                   <a:srgbClr val="1E2A30"/>
                 </a:solidFill>
@@ -16034,7 +16034,7 @@
               </a:lnSpc>
             </a:pPr>
             <a:r>
-              <a:rPr sz="2200" b="0">
+              <a:rPr sz="2200" b="0" lang="ko-KR" altLang="en-US">
                 <a:solidFill>
                   <a:srgbClr val="6B7A80"/>
                 </a:solidFill>
@@ -16075,7 +16075,7 @@
               </a:lnSpc>
             </a:pPr>
             <a:r>
-              <a:rPr sz="2100" b="0">
+              <a:rPr sz="2100" b="0" lang="ko-KR" altLang="en-US">
                 <a:solidFill>
                   <a:srgbClr val="6B7A80"/>
                 </a:solidFill>
@@ -16160,7 +16160,7 @@
               </a:lnSpc>
             </a:pPr>
             <a:r>
-              <a:rPr sz="2700" b="0">
+              <a:rPr sz="2700" b="0" lang="ko-KR" altLang="en-US">
                 <a:solidFill>
                   <a:srgbClr val="003956"/>
                 </a:solidFill>
@@ -16201,7 +16201,7 @@
               </a:lnSpc>
             </a:pPr>
             <a:r>
-              <a:rPr sz="1700" b="0">
+              <a:rPr sz="1700" b="0" lang="ko-KR" altLang="en-US">
                 <a:solidFill>
                   <a:srgbClr val="0E7D6B"/>
                 </a:solidFill>
@@ -16226,7 +16226,7 @@
               </a:lnSpc>
             </a:pPr>
             <a:r>
-              <a:rPr sz="1700" b="0">
+              <a:rPr sz="1700" b="0" lang="ko-KR" altLang="en-US">
                 <a:solidFill>
                   <a:srgbClr val="1E2A30"/>
                 </a:solidFill>
@@ -16244,7 +16244,7 @@
               </a:lnSpc>
             </a:pPr>
             <a:r>
-              <a:rPr sz="1700" b="0">
+              <a:rPr sz="1700" b="0" lang="ko-KR" altLang="en-US">
                 <a:solidFill>
                   <a:srgbClr val="1E2A30"/>
                 </a:solidFill>
@@ -16329,7 +16329,7 @@
               </a:lnSpc>
             </a:pPr>
             <a:r>
-              <a:rPr sz="2700" b="0">
+              <a:rPr sz="2700" b="0" lang="ko-KR" altLang="en-US">
                 <a:solidFill>
                   <a:srgbClr val="003956"/>
                 </a:solidFill>
@@ -16370,7 +16370,7 @@
               </a:lnSpc>
             </a:pPr>
             <a:r>
-              <a:rPr sz="2300" b="0">
+              <a:rPr sz="2300" b="0" lang="ko-KR" altLang="en-US">
                 <a:solidFill>
                   <a:srgbClr val="1E2A30"/>
                 </a:solidFill>
@@ -16381,7 +16381,7 @@
               <a:t>알고리즘 </a:t>
             </a:r>
             <a:r>
-              <a:rPr sz="2300" b="0">
+              <a:rPr sz="2300" b="0" lang="ko-KR" altLang="en-US">
                 <a:solidFill>
                   <a:srgbClr val="0E7D6B"/>
                 </a:solidFill>
@@ -16399,7 +16399,7 @@
               </a:lnSpc>
             </a:pPr>
             <a:r>
-              <a:rPr sz="2300" b="0">
+              <a:rPr sz="2300" b="0" lang="ko-KR" altLang="en-US">
                 <a:solidFill>
                   <a:srgbClr val="1E2A30"/>
                 </a:solidFill>
@@ -16417,7 +16417,7 @@
               </a:lnSpc>
             </a:pPr>
             <a:r>
-              <a:rPr sz="2300" b="0">
+              <a:rPr sz="2300" b="0" lang="ko-KR" altLang="en-US">
                 <a:solidFill>
                   <a:srgbClr val="1E2A30"/>
                 </a:solidFill>
@@ -16502,7 +16502,7 @@
               </a:lnSpc>
             </a:pPr>
             <a:r>
-              <a:rPr sz="2700" b="0">
+              <a:rPr sz="2700" b="0" lang="ko-KR" altLang="en-US">
                 <a:solidFill>
                   <a:srgbClr val="003956"/>
                 </a:solidFill>
@@ -16543,7 +16543,7 @@
               </a:lnSpc>
             </a:pPr>
             <a:r>
-              <a:rPr sz="2900" b="0">
+              <a:rPr sz="2800" b="0" lang="ko-KR" altLang="en-US">
                 <a:solidFill>
                   <a:srgbClr val="1E2A30"/>
                 </a:solidFill>
@@ -16561,7 +16561,7 @@
               </a:lnSpc>
             </a:pPr>
             <a:r>
-              <a:rPr sz="2900" b="0">
+              <a:rPr sz="2800" b="0" lang="ko-KR" altLang="en-US">
                 <a:solidFill>
                   <a:srgbClr val="1E2A30"/>
                 </a:solidFill>
@@ -16579,7 +16579,7 @@
               </a:lnSpc>
             </a:pPr>
             <a:r>
-              <a:rPr sz="2900" b="0">
+              <a:rPr sz="2800" b="0" lang="ko-KR" altLang="en-US">
                 <a:solidFill>
                   <a:srgbClr val="1E2A30"/>
                 </a:solidFill>
@@ -16590,7 +16590,7 @@
               <a:t>연구실 장난감이 아니라 </a:t>
             </a:r>
             <a:r>
-              <a:rPr sz="2900" b="0">
+              <a:rPr sz="2800" b="0" lang="ko-KR" altLang="en-US">
                 <a:solidFill>
                   <a:srgbClr val="0E7D6B"/>
                 </a:solidFill>
@@ -16601,7 +16601,7 @@
               <a:t>산업 현장의 표준 공구함</a:t>
             </a:r>
             <a:r>
-              <a:rPr sz="2900" b="0">
+              <a:rPr sz="2800" b="0" lang="ko-KR" altLang="en-US">
                 <a:solidFill>
                   <a:srgbClr val="1E2A30"/>
                 </a:solidFill>
@@ -16684,7 +16684,7 @@
               </a:lnSpc>
             </a:pPr>
             <a:r>
-              <a:rPr sz="2200" b="0">
+              <a:rPr sz="2200" b="0" lang="ko-KR" altLang="en-US">
                 <a:solidFill>
                   <a:srgbClr val="6B7A80"/>
                 </a:solidFill>
@@ -16819,7 +16819,7 @@
               </a:lnSpc>
             </a:pPr>
             <a:r>
-              <a:rPr sz="1250" b="0">
+              <a:rPr sz="1250" b="0" lang="ko-KR" altLang="en-US">
                 <a:solidFill>
                   <a:srgbClr val="003956"/>
                 </a:solidFill>
@@ -16837,7 +16837,7 @@
               </a:lnSpc>
             </a:pPr>
             <a:r>
-              <a:rPr sz="1250" b="0">
+              <a:rPr sz="1250" b="0" lang="ko-KR" altLang="en-US">
                 <a:solidFill>
                   <a:srgbClr val="003956"/>
                 </a:solidFill>
@@ -16878,7 +16878,7 @@
               </a:lnSpc>
             </a:pPr>
             <a:r>
-              <a:rPr sz="1600" b="0">
+              <a:rPr sz="1600" b="0" lang="ko-KR" altLang="en-US">
                 <a:solidFill>
                   <a:srgbClr val="96A8A7"/>
                 </a:solidFill>
@@ -16963,7 +16963,7 @@
               </a:lnSpc>
             </a:pPr>
             <a:r>
-              <a:rPr sz="3500" b="0">
+              <a:rPr sz="3500" b="0" lang="ko-KR" altLang="en-US">
                 <a:solidFill>
                   <a:srgbClr val="1E2A30"/>
                 </a:solidFill>
@@ -17046,7 +17046,7 @@
               </a:lnSpc>
             </a:pPr>
             <a:r>
-              <a:rPr sz="2200" b="0">
+              <a:rPr sz="2200" b="0" lang="ko-KR" altLang="en-US">
                 <a:solidFill>
                   <a:srgbClr val="6B7A80"/>
                 </a:solidFill>
@@ -17087,7 +17087,7 @@
               </a:lnSpc>
             </a:pPr>
             <a:r>
-              <a:rPr sz="2100" b="0">
+              <a:rPr sz="2100" b="0" lang="ko-KR" altLang="en-US">
                 <a:solidFill>
                   <a:srgbClr val="6B7A80"/>
                 </a:solidFill>
@@ -17172,7 +17172,7 @@
               </a:lnSpc>
             </a:pPr>
             <a:r>
-              <a:rPr sz="2600" b="0">
+              <a:rPr sz="2600" b="0" lang="ko-KR" altLang="en-US">
                 <a:solidFill>
                   <a:srgbClr val="1E2A30"/>
                 </a:solidFill>
@@ -17257,7 +17257,7 @@
               </a:lnSpc>
             </a:pPr>
             <a:r>
-              <a:rPr sz="2600" b="0">
+              <a:rPr sz="2600" b="0" lang="ko-KR" altLang="en-US">
                 <a:solidFill>
                   <a:srgbClr val="1E2A30"/>
                 </a:solidFill>
@@ -17342,7 +17342,7 @@
               </a:lnSpc>
             </a:pPr>
             <a:r>
-              <a:rPr sz="2600" b="0">
+              <a:rPr sz="2600" b="0" lang="ko-KR" altLang="en-US">
                 <a:solidFill>
                   <a:srgbClr val="1E2A30"/>
                 </a:solidFill>
@@ -17427,7 +17427,7 @@
               </a:lnSpc>
             </a:pPr>
             <a:r>
-              <a:rPr sz="2600" b="0">
+              <a:rPr sz="2600" b="0" lang="ko-KR" altLang="en-US">
                 <a:solidFill>
                   <a:srgbClr val="1E2A30"/>
                 </a:solidFill>
@@ -17468,7 +17468,7 @@
               </a:lnSpc>
             </a:pPr>
             <a:r>
-              <a:rPr sz="2600" b="0">
+              <a:rPr sz="2600" b="0" lang="ko-KR" altLang="en-US">
                 <a:solidFill>
                   <a:srgbClr val="1E2A30"/>
                 </a:solidFill>
@@ -17553,7 +17553,7 @@
               </a:lnSpc>
             </a:pPr>
             <a:r>
-              <a:rPr sz="2600" b="0">
+              <a:rPr sz="2600" b="0" lang="ko-KR" altLang="en-US">
                 <a:solidFill>
                   <a:srgbClr val="1E2A30"/>
                 </a:solidFill>
@@ -17638,7 +17638,7 @@
               </a:lnSpc>
             </a:pPr>
             <a:r>
-              <a:rPr sz="2600" b="0">
+              <a:rPr sz="2600" b="0" lang="ko-KR" altLang="en-US">
                 <a:solidFill>
                   <a:srgbClr val="1E2A30"/>
                 </a:solidFill>
@@ -17723,7 +17723,7 @@
               </a:lnSpc>
             </a:pPr>
             <a:r>
-              <a:rPr sz="2600" b="0">
+              <a:rPr sz="2600" b="0" lang="ko-KR" altLang="en-US">
                 <a:solidFill>
                   <a:srgbClr val="1E2A30"/>
                 </a:solidFill>
@@ -17808,7 +17808,7 @@
               </a:lnSpc>
             </a:pPr>
             <a:r>
-              <a:rPr sz="2600" b="0">
+              <a:rPr sz="2600" b="0" lang="ko-KR" altLang="en-US">
                 <a:solidFill>
                   <a:srgbClr val="1E2A30"/>
                 </a:solidFill>
@@ -17849,7 +17849,7 @@
               </a:lnSpc>
             </a:pPr>
             <a:r>
-              <a:rPr sz="2600" b="0">
+              <a:rPr sz="2600" b="0" lang="ko-KR" altLang="en-US">
                 <a:solidFill>
                   <a:srgbClr val="1E2A30"/>
                 </a:solidFill>
@@ -17934,7 +17934,7 @@
               </a:lnSpc>
             </a:pPr>
             <a:r>
-              <a:rPr sz="2700" b="0">
+              <a:rPr sz="2700" b="0" lang="ko-KR" altLang="en-US">
                 <a:solidFill>
                   <a:srgbClr val="003956"/>
                 </a:solidFill>
@@ -17975,7 +17975,7 @@
               </a:lnSpc>
             </a:pPr>
             <a:r>
-              <a:rPr sz="2300" b="0">
+              <a:rPr sz="2300" b="0" lang="ko-KR" altLang="en-US">
                 <a:solidFill>
                   <a:srgbClr val="1E2A30"/>
                 </a:solidFill>
@@ -17986,7 +17986,7 @@
               <a:t>인터페이스 </a:t>
             </a:r>
             <a:r>
-              <a:rPr sz="2300" b="0">
+              <a:rPr sz="2300" b="0" lang="ko-KR" altLang="en-US">
                 <a:solidFill>
                   <a:srgbClr val="0E7D6B"/>
                 </a:solidFill>
@@ -17997,7 +17997,7 @@
               <a:t>C++ · Python · Java · MATLAB</a:t>
             </a:r>
             <a:r>
-              <a:rPr sz="2300" b="0">
+              <a:rPr sz="2300" b="0" lang="ko-KR" altLang="en-US">
                 <a:solidFill>
                   <a:srgbClr val="1E2A30"/>
                 </a:solidFill>
@@ -18015,7 +18015,7 @@
               </a:lnSpc>
             </a:pPr>
             <a:r>
-              <a:rPr sz="2300" b="0">
+              <a:rPr sz="2300" b="0" lang="ko-KR" altLang="en-US">
                 <a:solidFill>
                   <a:srgbClr val="1E2A30"/>
                 </a:solidFill>
@@ -18098,7 +18098,7 @@
               </a:lnSpc>
             </a:pPr>
             <a:r>
-              <a:rPr sz="2200" b="0">
+              <a:rPr sz="2200" b="0" lang="ko-KR" altLang="en-US">
                 <a:solidFill>
                   <a:srgbClr val="6B7A80"/>
                 </a:solidFill>
@@ -18233,7 +18233,7 @@
               </a:lnSpc>
             </a:pPr>
             <a:r>
-              <a:rPr sz="1250" b="0">
+              <a:rPr sz="1250" b="0" lang="ko-KR" altLang="en-US">
                 <a:solidFill>
                   <a:srgbClr val="003956"/>
                 </a:solidFill>
@@ -18251,7 +18251,7 @@
               </a:lnSpc>
             </a:pPr>
             <a:r>
-              <a:rPr sz="1250" b="0">
+              <a:rPr sz="1250" b="0" lang="ko-KR" altLang="en-US">
                 <a:solidFill>
                   <a:srgbClr val="003956"/>
                 </a:solidFill>
@@ -18292,7 +18292,7 @@
               </a:lnSpc>
             </a:pPr>
             <a:r>
-              <a:rPr sz="1600" b="0">
+              <a:rPr sz="1600" b="0" lang="ko-KR" altLang="en-US">
                 <a:solidFill>
                   <a:srgbClr val="96A8A7"/>
                 </a:solidFill>
@@ -18377,7 +18377,7 @@
               </a:lnSpc>
             </a:pPr>
             <a:r>
-              <a:rPr sz="3500" b="0">
+              <a:rPr sz="3500" b="0" lang="ko-KR" altLang="en-US">
                 <a:solidFill>
                   <a:srgbClr val="1E2A30"/>
                 </a:solidFill>
@@ -18460,7 +18460,7 @@
               </a:lnSpc>
             </a:pPr>
             <a:r>
-              <a:rPr sz="2200" b="0">
+              <a:rPr sz="2200" b="0" lang="ko-KR" altLang="en-US">
                 <a:solidFill>
                   <a:srgbClr val="6B7A80"/>
                 </a:solidFill>
@@ -18501,7 +18501,7 @@
               </a:lnSpc>
             </a:pPr>
             <a:r>
-              <a:rPr sz="2100" b="0">
+              <a:rPr sz="2100" b="0" lang="ko-KR" altLang="en-US">
                 <a:solidFill>
                   <a:srgbClr val="6B7A80"/>
                 </a:solidFill>
@@ -18656,7 +18656,7 @@
               </a:lnSpc>
             </a:pPr>
             <a:r>
-              <a:rPr sz="2300" b="0">
+              <a:rPr sz="2300" b="0" lang="ko-KR" altLang="en-US">
                 <a:solidFill>
                   <a:srgbClr val="6B7A80"/>
                 </a:solidFill>
@@ -18783,7 +18783,7 @@
               </a:lnSpc>
             </a:pPr>
             <a:r>
-              <a:rPr sz="2500" b="0">
+              <a:rPr sz="2500" b="0" lang="ko-KR" altLang="en-US">
                 <a:solidFill>
                   <a:srgbClr val="0E7D6B"/>
                 </a:solidFill>
@@ -18824,7 +18824,7 @@
               </a:lnSpc>
             </a:pPr>
             <a:r>
-              <a:rPr sz="1700" b="0">
+              <a:rPr sz="1700" b="0" lang="ko-KR" altLang="en-US">
                 <a:solidFill>
                   <a:srgbClr val="1E2A30"/>
                 </a:solidFill>
@@ -18842,7 +18842,7 @@
               </a:lnSpc>
             </a:pPr>
             <a:r>
-              <a:rPr sz="1700" b="0">
+              <a:rPr sz="1700" b="0" lang="ko-KR" altLang="en-US">
                 <a:solidFill>
                   <a:srgbClr val="1E2A30"/>
                 </a:solidFill>
@@ -18883,7 +18883,7 @@
               </a:lnSpc>
             </a:pPr>
             <a:r>
-              <a:rPr sz="3300" b="0">
+              <a:rPr sz="3300" b="0" lang="ko-KR" altLang="en-US">
                 <a:solidFill>
                   <a:srgbClr val="6B7A80"/>
                 </a:solidFill>
@@ -19010,7 +19010,7 @@
               </a:lnSpc>
             </a:pPr>
             <a:r>
-              <a:rPr sz="2500" b="0">
+              <a:rPr sz="2500" b="0" lang="ko-KR" altLang="en-US">
                 <a:solidFill>
                   <a:srgbClr val="0E7D6B"/>
                 </a:solidFill>
@@ -19051,7 +19051,7 @@
               </a:lnSpc>
             </a:pPr>
             <a:r>
-              <a:rPr sz="1700" b="0">
+              <a:rPr sz="1700" b="0" lang="ko-KR" altLang="en-US">
                 <a:solidFill>
                   <a:srgbClr val="1E2A30"/>
                 </a:solidFill>
@@ -19069,7 +19069,7 @@
               </a:lnSpc>
             </a:pPr>
             <a:r>
-              <a:rPr sz="1700" b="0">
+              <a:rPr sz="1700" b="0" lang="ko-KR" altLang="en-US">
                 <a:solidFill>
                   <a:srgbClr val="1E2A30"/>
                 </a:solidFill>
@@ -19110,7 +19110,7 @@
               </a:lnSpc>
             </a:pPr>
             <a:r>
-              <a:rPr sz="3300" b="0">
+              <a:rPr sz="3300" b="0" lang="ko-KR" altLang="en-US">
                 <a:solidFill>
                   <a:srgbClr val="6B7A80"/>
                 </a:solidFill>
@@ -19237,7 +19237,7 @@
               </a:lnSpc>
             </a:pPr>
             <a:r>
-              <a:rPr sz="2500" b="0">
+              <a:rPr sz="2500" b="0" lang="ko-KR" altLang="en-US">
                 <a:solidFill>
                   <a:srgbClr val="0E7D6B"/>
                 </a:solidFill>
@@ -19278,7 +19278,7 @@
               </a:lnSpc>
             </a:pPr>
             <a:r>
-              <a:rPr sz="1700" b="0">
+              <a:rPr sz="1700" b="0" lang="ko-KR" altLang="en-US">
                 <a:solidFill>
                   <a:srgbClr val="1E2A30"/>
                 </a:solidFill>
@@ -19296,7 +19296,7 @@
               </a:lnSpc>
             </a:pPr>
             <a:r>
-              <a:rPr sz="1700" b="0">
+              <a:rPr sz="1700" b="0" lang="ko-KR" altLang="en-US">
                 <a:solidFill>
                   <a:srgbClr val="1E2A30"/>
                 </a:solidFill>
@@ -19337,7 +19337,7 @@
               </a:lnSpc>
             </a:pPr>
             <a:r>
-              <a:rPr sz="3300" b="0">
+              <a:rPr sz="3300" b="0" lang="ko-KR" altLang="en-US">
                 <a:solidFill>
                   <a:srgbClr val="6B7A80"/>
                 </a:solidFill>
@@ -19464,7 +19464,7 @@
               </a:lnSpc>
             </a:pPr>
             <a:r>
-              <a:rPr sz="2500" b="0">
+              <a:rPr sz="2500" b="0" lang="ko-KR" altLang="en-US">
                 <a:solidFill>
                   <a:srgbClr val="0E7D6B"/>
                 </a:solidFill>
@@ -19505,7 +19505,7 @@
               </a:lnSpc>
             </a:pPr>
             <a:r>
-              <a:rPr sz="1700" b="0">
+              <a:rPr sz="1700" b="0" lang="ko-KR" altLang="en-US">
                 <a:solidFill>
                   <a:srgbClr val="1E2A30"/>
                 </a:solidFill>
@@ -19523,7 +19523,7 @@
               </a:lnSpc>
             </a:pPr>
             <a:r>
-              <a:rPr sz="1700" b="0">
+              <a:rPr sz="1700" b="0" lang="ko-KR" altLang="en-US">
                 <a:solidFill>
                   <a:srgbClr val="1E2A30"/>
                 </a:solidFill>
@@ -19606,7 +19606,7 @@
               </a:lnSpc>
             </a:pPr>
             <a:r>
-              <a:rPr sz="2200" b="0">
+              <a:rPr sz="2200" b="0" lang="ko-KR" altLang="en-US">
                 <a:solidFill>
                   <a:srgbClr val="6B7A80"/>
                 </a:solidFill>
@@ -19624,7 +19624,7 @@
               </a:lnSpc>
             </a:pPr>
             <a:r>
-              <a:rPr sz="2200" b="0">
+              <a:rPr sz="2200" b="0" lang="ko-KR" altLang="en-US">
                 <a:solidFill>
                   <a:srgbClr val="6B7A80"/>
                 </a:solidFill>
@@ -19759,7 +19759,7 @@
               </a:lnSpc>
             </a:pPr>
             <a:r>
-              <a:rPr sz="1250" b="0">
+              <a:rPr sz="1250" b="0" lang="ko-KR" altLang="en-US">
                 <a:solidFill>
                   <a:srgbClr val="003956"/>
                 </a:solidFill>
@@ -19777,7 +19777,7 @@
               </a:lnSpc>
             </a:pPr>
             <a:r>
-              <a:rPr sz="1250" b="0">
+              <a:rPr sz="1250" b="0" lang="ko-KR" altLang="en-US">
                 <a:solidFill>
                   <a:srgbClr val="003956"/>
                 </a:solidFill>
@@ -19818,7 +19818,7 @@
               </a:lnSpc>
             </a:pPr>
             <a:r>
-              <a:rPr sz="1600" b="0">
+              <a:rPr sz="1600" b="0" lang="ko-KR" altLang="en-US">
                 <a:solidFill>
                   <a:srgbClr val="96A8A7"/>
                 </a:solidFill>
@@ -19903,7 +19903,7 @@
               </a:lnSpc>
             </a:pPr>
             <a:r>
-              <a:rPr sz="3500" b="0">
+              <a:rPr sz="3500" b="0" lang="ko-KR" altLang="en-US">
                 <a:solidFill>
                   <a:srgbClr val="1E2A30"/>
                 </a:solidFill>
@@ -19986,7 +19986,7 @@
               </a:lnSpc>
             </a:pPr>
             <a:r>
-              <a:rPr sz="2200" b="0">
+              <a:rPr sz="2200" b="0" lang="ko-KR" altLang="en-US">
                 <a:solidFill>
                   <a:srgbClr val="6B7A80"/>
                 </a:solidFill>
@@ -20027,7 +20027,7 @@
               </a:lnSpc>
             </a:pPr>
             <a:r>
-              <a:rPr sz="2100" b="0">
+              <a:rPr sz="2100" b="0" lang="ko-KR" altLang="en-US">
                 <a:solidFill>
                   <a:srgbClr val="6B7A80"/>
                 </a:solidFill>
@@ -20108,11 +20108,11 @@
           <a:p>
             <a:pPr algn="ctr">
               <a:lnSpc>
-                <a:spcPct val="125000"/>
-              </a:lnSpc>
-            </a:pPr>
-            <a:r>
-              <a:rPr sz="2500" b="0">
+                <a:spcPct val="115000"/>
+              </a:lnSpc>
+            </a:pPr>
+            <a:r>
+              <a:rPr sz="2500" b="0" lang="ko-KR" altLang="en-US">
                 <a:solidFill>
                   <a:srgbClr val="0E7D6B"/>
                 </a:solidFill>
@@ -20149,11 +20149,11 @@
           <a:p>
             <a:pPr algn="ctr">
               <a:lnSpc>
-                <a:spcPct val="125000"/>
-              </a:lnSpc>
-            </a:pPr>
-            <a:r>
-              <a:rPr sz="2500" b="0">
+                <a:spcPct val="115000"/>
+              </a:lnSpc>
+            </a:pPr>
+            <a:r>
+              <a:rPr sz="2500" b="0" lang="ko-KR" altLang="en-US">
                 <a:solidFill>
                   <a:srgbClr val="0E7D6B"/>
                 </a:solidFill>
@@ -20238,7 +20238,7 @@
               </a:lnSpc>
             </a:pPr>
             <a:r>
-              <a:rPr sz="2500" b="0">
+              <a:rPr sz="2500" b="0" lang="ko-KR" altLang="en-US">
                 <a:solidFill>
                   <a:srgbClr val="1E2A30"/>
                 </a:solidFill>
@@ -20279,7 +20279,7 @@
               </a:lnSpc>
             </a:pPr>
             <a:r>
-              <a:rPr sz="2500" b="0">
+              <a:rPr sz="2500" b="0" lang="ko-KR" altLang="en-US">
                 <a:solidFill>
                   <a:srgbClr val="1E2A30"/>
                 </a:solidFill>
@@ -20320,7 +20320,7 @@
               </a:lnSpc>
             </a:pPr>
             <a:r>
-              <a:rPr sz="2500" b="0">
+              <a:rPr sz="2500" b="0" lang="ko-KR" altLang="en-US">
                 <a:solidFill>
                   <a:srgbClr val="1E2A30"/>
                 </a:solidFill>
@@ -20361,7 +20361,7 @@
               </a:lnSpc>
             </a:pPr>
             <a:r>
-              <a:rPr sz="2500" b="0">
+              <a:rPr sz="2500" b="0" lang="ko-KR" altLang="en-US">
                 <a:solidFill>
                   <a:srgbClr val="1E2A30"/>
                 </a:solidFill>
@@ -20446,7 +20446,7 @@
               </a:lnSpc>
             </a:pPr>
             <a:r>
-              <a:rPr sz="2500" b="0">
+              <a:rPr sz="2500" b="0" lang="ko-KR" altLang="en-US">
                 <a:solidFill>
                   <a:srgbClr val="1E2A30"/>
                 </a:solidFill>
@@ -20487,7 +20487,7 @@
               </a:lnSpc>
             </a:pPr>
             <a:r>
-              <a:rPr sz="2500" b="0">
+              <a:rPr sz="2500" b="0" lang="ko-KR" altLang="en-US">
                 <a:solidFill>
                   <a:srgbClr val="1E2A30"/>
                 </a:solidFill>
@@ -20528,7 +20528,7 @@
               </a:lnSpc>
             </a:pPr>
             <a:r>
-              <a:rPr sz="2500" b="0">
+              <a:rPr sz="2500" b="0" lang="ko-KR" altLang="en-US">
                 <a:solidFill>
                   <a:srgbClr val="1E2A30"/>
                 </a:solidFill>
@@ -20569,7 +20569,7 @@
               </a:lnSpc>
             </a:pPr>
             <a:r>
-              <a:rPr sz="2500" b="0">
+              <a:rPr sz="2500" b="0" lang="ko-KR" altLang="en-US">
                 <a:solidFill>
                   <a:srgbClr val="1E2A30"/>
                 </a:solidFill>
@@ -20654,7 +20654,7 @@
               </a:lnSpc>
             </a:pPr>
             <a:r>
-              <a:rPr sz="2900" b="0">
+              <a:rPr sz="2900" b="0" lang="ko-KR" altLang="en-US">
                 <a:solidFill>
                   <a:srgbClr val="1E2A30"/>
                 </a:solidFill>
@@ -20781,7 +20781,7 @@
               </a:lnSpc>
             </a:pPr>
             <a:r>
-              <a:rPr sz="2900" b="0">
+              <a:rPr sz="2900" b="0" lang="ko-KR" altLang="en-US">
                 <a:solidFill>
                   <a:srgbClr val="1E2A30"/>
                 </a:solidFill>
@@ -20864,7 +20864,7 @@
               </a:lnSpc>
             </a:pPr>
             <a:r>
-              <a:rPr sz="2800" b="0">
+              <a:rPr sz="2800" b="0" lang="ko-KR" altLang="en-US">
                 <a:solidFill>
                   <a:srgbClr val="1E2A30"/>
                 </a:solidFill>
@@ -20875,7 +20875,7 @@
               <a:t>1행씩 해석 → </a:t>
             </a:r>
             <a:r>
-              <a:rPr sz="2800" b="0">
+              <a:rPr sz="2800" b="0" lang="ko-KR" altLang="en-US">
                 <a:solidFill>
                   <a:srgbClr val="0E7D6B"/>
                 </a:solidFill>
@@ -20916,7 +20916,7 @@
               </a:lnSpc>
             </a:pPr>
             <a:r>
-              <a:rPr sz="2800" b="0">
+              <a:rPr sz="2800" b="0" lang="ko-KR" altLang="en-US">
                 <a:solidFill>
                   <a:srgbClr val="1E2A30"/>
                 </a:solidFill>
@@ -20957,7 +20957,7 @@
               </a:lnSpc>
             </a:pPr>
             <a:r>
-              <a:rPr sz="2800" b="0">
+              <a:rPr sz="2800" b="0" lang="ko-KR" altLang="en-US">
                 <a:solidFill>
                   <a:srgbClr val="1E2A30"/>
                 </a:solidFill>
@@ -20998,7 +20998,7 @@
               </a:lnSpc>
             </a:pPr>
             <a:r>
-              <a:rPr sz="2800" b="0">
+              <a:rPr sz="2800" b="0" lang="ko-KR" altLang="en-US">
                 <a:solidFill>
                   <a:srgbClr val="1E2A30"/>
                 </a:solidFill>
@@ -21081,7 +21081,7 @@
               </a:lnSpc>
             </a:pPr>
             <a:r>
-              <a:rPr sz="2200" b="0">
+              <a:rPr sz="2200" b="0" lang="ko-KR" altLang="en-US">
                 <a:solidFill>
                   <a:srgbClr val="6B7A80"/>
                 </a:solidFill>
@@ -21216,7 +21216,7 @@
               </a:lnSpc>
             </a:pPr>
             <a:r>
-              <a:rPr sz="1250" b="0">
+              <a:rPr sz="1250" b="0" lang="ko-KR" altLang="en-US">
                 <a:solidFill>
                   <a:srgbClr val="003956"/>
                 </a:solidFill>
@@ -21234,7 +21234,7 @@
               </a:lnSpc>
             </a:pPr>
             <a:r>
-              <a:rPr sz="1250" b="0">
+              <a:rPr sz="1250" b="0" lang="ko-KR" altLang="en-US">
                 <a:solidFill>
                   <a:srgbClr val="003956"/>
                 </a:solidFill>
@@ -21275,7 +21275,7 @@
               </a:lnSpc>
             </a:pPr>
             <a:r>
-              <a:rPr sz="1600" b="0">
+              <a:rPr sz="1600" b="0" lang="ko-KR" altLang="en-US">
                 <a:solidFill>
                   <a:srgbClr val="96A8A7"/>
                 </a:solidFill>
@@ -21360,7 +21360,7 @@
               </a:lnSpc>
             </a:pPr>
             <a:r>
-              <a:rPr sz="3500" b="0">
+              <a:rPr sz="3500" b="0" lang="ko-KR" altLang="en-US">
                 <a:solidFill>
                   <a:srgbClr val="1E2A30"/>
                 </a:solidFill>
@@ -21443,7 +21443,7 @@
               </a:lnSpc>
             </a:pPr>
             <a:r>
-              <a:rPr sz="2200" b="0">
+              <a:rPr sz="2200" b="0" lang="ko-KR" altLang="en-US">
                 <a:solidFill>
                   <a:srgbClr val="6B7A80"/>
                 </a:solidFill>
@@ -21484,7 +21484,7 @@
               </a:lnSpc>
             </a:pPr>
             <a:r>
-              <a:rPr sz="2100" b="0">
+              <a:rPr sz="2100" b="0" lang="ko-KR" altLang="en-US">
                 <a:solidFill>
                   <a:srgbClr val="6B7A80"/>
                 </a:solidFill>
@@ -21611,7 +21611,7 @@
               </a:lnSpc>
             </a:pPr>
             <a:r>
-              <a:rPr sz="2500" b="0">
+              <a:rPr sz="2500" b="0" lang="ko-KR" altLang="en-US">
                 <a:solidFill>
                   <a:srgbClr val="0E7D6B"/>
                 </a:solidFill>
@@ -21652,7 +21652,7 @@
               </a:lnSpc>
             </a:pPr>
             <a:r>
-              <a:rPr sz="1900" b="0">
+              <a:rPr sz="1900" b="0" lang="ko-KR" altLang="en-US">
                 <a:solidFill>
                   <a:srgbClr val="1E2A30"/>
                 </a:solidFill>
@@ -21670,7 +21670,7 @@
               </a:lnSpc>
             </a:pPr>
             <a:r>
-              <a:rPr sz="1900" b="0">
+              <a:rPr sz="1900" b="0" lang="ko-KR" altLang="en-US">
                 <a:solidFill>
                   <a:srgbClr val="1E2A30"/>
                 </a:solidFill>
@@ -21688,7 +21688,7 @@
               </a:lnSpc>
             </a:pPr>
             <a:r>
-              <a:rPr sz="1900" b="0">
+              <a:rPr sz="1900" b="0" lang="ko-KR" altLang="en-US">
                 <a:solidFill>
                   <a:srgbClr val="1E2A30"/>
                 </a:solidFill>
@@ -21729,7 +21729,7 @@
               </a:lnSpc>
             </a:pPr>
             <a:r>
-              <a:rPr sz="3300" b="0">
+              <a:rPr sz="3300" b="0" lang="ko-KR" altLang="en-US">
                 <a:solidFill>
                   <a:srgbClr val="6B7A80"/>
                 </a:solidFill>
@@ -21856,7 +21856,7 @@
               </a:lnSpc>
             </a:pPr>
             <a:r>
-              <a:rPr sz="2500" b="0">
+              <a:rPr sz="2500" b="0" lang="ko-KR" altLang="en-US">
                 <a:solidFill>
                   <a:srgbClr val="0E7D6B"/>
                 </a:solidFill>
@@ -21897,7 +21897,7 @@
               </a:lnSpc>
             </a:pPr>
             <a:r>
-              <a:rPr sz="1900" b="0">
+              <a:rPr sz="1900" b="0" lang="ko-KR" altLang="en-US">
                 <a:solidFill>
                   <a:srgbClr val="1E2A30"/>
                 </a:solidFill>
@@ -21915,7 +21915,7 @@
               </a:lnSpc>
             </a:pPr>
             <a:r>
-              <a:rPr sz="1900" b="0">
+              <a:rPr sz="1900" b="0" lang="ko-KR" altLang="en-US">
                 <a:solidFill>
                   <a:srgbClr val="1E2A30"/>
                 </a:solidFill>
@@ -21933,7 +21933,7 @@
               </a:lnSpc>
             </a:pPr>
             <a:r>
-              <a:rPr sz="1900" b="0">
+              <a:rPr sz="1900" b="0" lang="ko-KR" altLang="en-US">
                 <a:solidFill>
                   <a:srgbClr val="1E2A30"/>
                 </a:solidFill>
@@ -21974,7 +21974,7 @@
               </a:lnSpc>
             </a:pPr>
             <a:r>
-              <a:rPr sz="3300" b="0">
+              <a:rPr sz="3300" b="0" lang="ko-KR" altLang="en-US">
                 <a:solidFill>
                   <a:srgbClr val="6B7A80"/>
                 </a:solidFill>
@@ -22101,7 +22101,7 @@
               </a:lnSpc>
             </a:pPr>
             <a:r>
-              <a:rPr sz="2500" b="0">
+              <a:rPr sz="2500" b="0" lang="ko-KR" altLang="en-US">
                 <a:solidFill>
                   <a:srgbClr val="0E7D6B"/>
                 </a:solidFill>
@@ -22142,7 +22142,7 @@
               </a:lnSpc>
             </a:pPr>
             <a:r>
-              <a:rPr sz="1900" b="0">
+              <a:rPr sz="1900" b="0" lang="ko-KR" altLang="en-US">
                 <a:solidFill>
                   <a:srgbClr val="1E2A30"/>
                 </a:solidFill>
@@ -22160,7 +22160,7 @@
               </a:lnSpc>
             </a:pPr>
             <a:r>
-              <a:rPr sz="1900" b="0">
+              <a:rPr sz="1900" b="0" lang="ko-KR" altLang="en-US">
                 <a:solidFill>
                   <a:srgbClr val="1E2A30"/>
                 </a:solidFill>
@@ -22178,7 +22178,7 @@
               </a:lnSpc>
             </a:pPr>
             <a:r>
-              <a:rPr sz="1900" b="0">
+              <a:rPr sz="1900" b="0" lang="ko-KR" altLang="en-US">
                 <a:solidFill>
                   <a:srgbClr val="1E2A30"/>
                 </a:solidFill>
@@ -22219,7 +22219,7 @@
               </a:lnSpc>
             </a:pPr>
             <a:r>
-              <a:rPr sz="3300" b="0">
+              <a:rPr sz="3300" b="0" lang="ko-KR" altLang="en-US">
                 <a:solidFill>
                   <a:srgbClr val="6B7A80"/>
                 </a:solidFill>
@@ -22346,7 +22346,7 @@
               </a:lnSpc>
             </a:pPr>
             <a:r>
-              <a:rPr sz="2500" b="0">
+              <a:rPr sz="2500" b="0" lang="ko-KR" altLang="en-US">
                 <a:solidFill>
                   <a:srgbClr val="0E7D6B"/>
                 </a:solidFill>
@@ -22387,7 +22387,7 @@
               </a:lnSpc>
             </a:pPr>
             <a:r>
-              <a:rPr sz="1900" b="0">
+              <a:rPr sz="1900" b="0" lang="ko-KR" altLang="en-US">
                 <a:solidFill>
                   <a:srgbClr val="1E2A30"/>
                 </a:solidFill>
@@ -22405,7 +22405,7 @@
               </a:lnSpc>
             </a:pPr>
             <a:r>
-              <a:rPr sz="1900" b="0">
+              <a:rPr sz="1900" b="0" lang="ko-KR" altLang="en-US">
                 <a:solidFill>
                   <a:srgbClr val="1E2A30"/>
                 </a:solidFill>
@@ -22423,7 +22423,7 @@
               </a:lnSpc>
             </a:pPr>
             <a:r>
-              <a:rPr sz="1900" b="0">
+              <a:rPr sz="1900" b="0" lang="ko-KR" altLang="en-US">
                 <a:solidFill>
                   <a:srgbClr val="1E2A30"/>
                 </a:solidFill>
@@ -22510,7 +22510,7 @@
               </a:lnSpc>
             </a:pPr>
             <a:r>
-              <a:rPr sz="2600" b="0">
+              <a:rPr sz="2600" b="0" lang="ko-KR" altLang="en-US">
                 <a:solidFill>
                   <a:srgbClr val="C1662F"/>
                 </a:solidFill>
@@ -22551,7 +22551,7 @@
               </a:lnSpc>
             </a:pPr>
             <a:r>
-              <a:rPr sz="1700" b="0">
+              <a:rPr sz="1700" b="0" lang="ko-KR" altLang="en-US">
                 <a:solidFill>
                   <a:srgbClr val="1E2A30"/>
                 </a:solidFill>
@@ -22562,7 +22562,7 @@
               <a:t>① 파이썬 설치 시 </a:t>
             </a:r>
             <a:r>
-              <a:rPr sz="1700" b="0">
+              <a:rPr sz="1700" b="0" lang="ko-KR" altLang="en-US">
                 <a:solidFill>
                   <a:srgbClr val="0E7D6B"/>
                 </a:solidFill>
@@ -22573,7 +22573,7 @@
               <a:t>'Add Python to PATH' 체크</a:t>
             </a:r>
             <a:r>
-              <a:rPr sz="1700" b="0">
+              <a:rPr sz="1700" b="0" lang="ko-KR" altLang="en-US">
                 <a:solidFill>
                   <a:srgbClr val="1E2A30"/>
                 </a:solidFill>
@@ -22591,7 +22591,7 @@
               </a:lnSpc>
             </a:pPr>
             <a:r>
-              <a:rPr sz="1700" b="0">
+              <a:rPr sz="1700" b="0" lang="ko-KR" altLang="en-US">
                 <a:solidFill>
                   <a:srgbClr val="1E2A30"/>
                 </a:solidFill>
@@ -22602,7 +22602,7 @@
               <a:t>② 파이참에서 </a:t>
             </a:r>
             <a:r>
-              <a:rPr sz="1700" b="0">
+              <a:rPr sz="1700" b="0" lang="ko-KR" altLang="en-US">
                 <a:solidFill>
                   <a:srgbClr val="0E7D6B"/>
                 </a:solidFill>
@@ -22613,7 +22613,7 @@
               <a:t>인터프리터 미연결</a:t>
             </a:r>
             <a:r>
-              <a:rPr sz="1700" b="0">
+              <a:rPr sz="1700" b="0" lang="ko-KR" altLang="en-US">
                 <a:solidFill>
                   <a:srgbClr val="1E2A30"/>
                 </a:solidFill>
@@ -22698,7 +22698,7 @@
               </a:lnSpc>
             </a:pPr>
             <a:r>
-              <a:rPr sz="2700" b="0">
+              <a:rPr sz="2700" b="0" lang="ko-KR" altLang="en-US">
                 <a:solidFill>
                   <a:srgbClr val="003956"/>
                 </a:solidFill>
@@ -22739,7 +22739,7 @@
               </a:lnSpc>
             </a:pPr>
             <a:r>
-              <a:rPr sz="2200" b="0">
+              <a:rPr sz="2200" b="0" lang="ko-KR" altLang="en-US">
                 <a:solidFill>
                   <a:srgbClr val="1E2A30"/>
                 </a:solidFill>
@@ -22750,7 +22750,7 @@
               <a:t>교재는 Python 3.9, 교수님 자료는 3.11 화면 기준 — </a:t>
             </a:r>
             <a:r>
-              <a:rPr sz="2200" b="0">
+              <a:rPr sz="2200" b="0" lang="ko-KR" altLang="en-US">
                 <a:solidFill>
                   <a:srgbClr val="0E7D6B"/>
                 </a:solidFill>
@@ -22761,7 +22761,7 @@
               <a:t>버전이 달라도 절차는 같다.</a:t>
             </a:r>
             <a:r>
-              <a:rPr sz="2200" b="0">
+              <a:rPr sz="2200" b="0" lang="ko-KR" altLang="en-US">
                 <a:solidFill>
                   <a:srgbClr val="1E2A30"/>
                 </a:solidFill>
@@ -22844,7 +22844,7 @@
               </a:lnSpc>
             </a:pPr>
             <a:r>
-              <a:rPr sz="2200" b="0">
+              <a:rPr sz="2200" b="0" lang="ko-KR" altLang="en-US">
                 <a:solidFill>
                   <a:srgbClr val="6B7A80"/>
                 </a:solidFill>
